--- a/Notes/BGP Routing.pptx
+++ b/Notes/BGP Routing.pptx
@@ -21,6 +21,7 @@
     <p:sldId id="266" r:id="rId14"/>
     <p:sldId id="267" r:id="rId15"/>
     <p:sldId id="268" r:id="rId16"/>
+    <p:sldId id="269" r:id="rId17"/>
   </p:sldIdLst>
   <p:sldSz cx="12192000" cy="6858000"/>
   <p:notesSz cx="7559675" cy="10691813"/>
@@ -76,6 +77,9 @@
               <a:lnSpc>
                 <a:spcPct val="90000"/>
               </a:lnSpc>
+              <a:tabLst>
+                <a:tab pos="0" algn="l"/>
+              </a:tabLst>
             </a:pPr>
             <a:r>
               <a:rPr lang="en-US" sz="6000" b="0" u="none" strike="noStrike">
@@ -381,7 +385,7 @@
             <a:pPr indent="0" algn="r">
               <a:buNone/>
             </a:pPr>
-            <a:fld id="{424549DB-6987-4F9F-A0CA-09EA47B27FE4}" type="slidenum">
+            <a:fld id="{53BC0BE3-6182-409D-AE9C-3FBBC67E0260}" type="slidenum">
               <a:rPr lang="en-AU" sz="1400" b="0" u="none" strike="noStrike">
                 <a:solidFill>
                   <a:srgbClr val="000000"/>
@@ -428,7 +432,7 @@
       </p:grpSpPr>
       <p:sp>
         <p:nvSpPr>
-          <p:cNvPr id="74" name="PlaceHolder 1"/>
+          <p:cNvPr id="76" name="PlaceHolder 1"/>
           <p:cNvSpPr>
             <a:spLocks noGrp="1"/>
           </p:cNvSpPr>
@@ -439,7 +443,7 @@
         <p:spPr>
           <a:xfrm>
             <a:off x="685800" y="1143000"/>
-            <a:ext cx="5486040" cy="3085920"/>
+            <a:ext cx="5485680" cy="3085560"/>
           </a:xfrm>
           <a:prstGeom prst="rect">
             <a:avLst/>
@@ -451,7 +455,7 @@
       </p:sp>
       <p:sp>
         <p:nvSpPr>
-          <p:cNvPr id="75" name="PlaceHolder 2"/>
+          <p:cNvPr id="77" name="PlaceHolder 2"/>
           <p:cNvSpPr>
             <a:spLocks noGrp="1"/>
           </p:cNvSpPr>
@@ -462,7 +466,7 @@
         <p:spPr>
           <a:xfrm>
             <a:off x="685800" y="4400640"/>
-            <a:ext cx="5486040" cy="3600000"/>
+            <a:ext cx="5485680" cy="3599640"/>
           </a:xfrm>
           <a:prstGeom prst="rect">
             <a:avLst/>
@@ -482,6 +486,9 @@
                 <a:spcPct val="100000"/>
               </a:lnSpc>
               <a:buNone/>
+              <a:tabLst>
+                <a:tab pos="0" algn="l"/>
+              </a:tabLst>
             </a:pPr>
             <a:r>
               <a:rPr lang="en-US" sz="2000" b="0" u="none" strike="noStrike">
@@ -507,7 +514,7 @@
       </p:sp>
       <p:sp>
         <p:nvSpPr>
-          <p:cNvPr id="76" name="PlaceHolder 3"/>
+          <p:cNvPr id="78" name="PlaceHolder 3"/>
           <p:cNvSpPr>
             <a:spLocks noGrp="1"/>
           </p:cNvSpPr>
@@ -518,7 +525,7 @@
         <p:spPr>
           <a:xfrm>
             <a:off x="3884760" y="8685360"/>
-            <a:ext cx="2971440" cy="458280"/>
+            <a:ext cx="2971080" cy="457920"/>
           </a:xfrm>
           <a:prstGeom prst="rect">
             <a:avLst/>
@@ -538,6 +545,9 @@
                 <a:spcPct val="100000"/>
               </a:lnSpc>
               <a:buNone/>
+              <a:tabLst>
+                <a:tab pos="0" algn="l"/>
+              </a:tabLst>
               <a:defRPr lang="en-AU" sz="1200" b="0" u="none" strike="noStrike">
                 <a:solidFill>
                   <a:srgbClr val="000000"/>
@@ -554,8 +564,11 @@
                 <a:spcPct val="100000"/>
               </a:lnSpc>
               <a:buNone/>
-            </a:pPr>
-            <a:fld id="{E88109B4-C109-4687-AA9D-1E55B27D6A22}" type="slidenum">
+              <a:tabLst>
+                <a:tab pos="0" algn="l"/>
+              </a:tabLst>
+            </a:pPr>
+            <a:fld id="{6A25152F-CE7E-4FB3-8DB6-A5521F9ACA8B}" type="slidenum">
               <a:rPr lang="en-AU" sz="1200" b="0" u="none" strike="noStrike">
                 <a:solidFill>
                   <a:srgbClr val="000000"/>
@@ -564,7 +577,7 @@
                 <a:uFillTx/>
                 <a:latin typeface="Times New Roman"/>
               </a:rPr>
-              <a:t>13</a:t>
+              <a:t>&lt;number&gt;</a:t>
             </a:fld>
             <a:endParaRPr lang="en-AU" sz="1200" b="0" u="none" strike="noStrike">
               <a:solidFill>
@@ -601,7 +614,7 @@
       </p:grpSpPr>
       <p:sp>
         <p:nvSpPr>
-          <p:cNvPr id="77" name="PlaceHolder 1"/>
+          <p:cNvPr id="79" name="PlaceHolder 1"/>
           <p:cNvSpPr>
             <a:spLocks noGrp="1"/>
           </p:cNvSpPr>
@@ -612,7 +625,7 @@
         <p:spPr>
           <a:xfrm>
             <a:off x="685800" y="1143000"/>
-            <a:ext cx="5486040" cy="3085920"/>
+            <a:ext cx="5485680" cy="3085560"/>
           </a:xfrm>
           <a:prstGeom prst="rect">
             <a:avLst/>
@@ -624,7 +637,7 @@
       </p:sp>
       <p:sp>
         <p:nvSpPr>
-          <p:cNvPr id="78" name="PlaceHolder 2"/>
+          <p:cNvPr id="80" name="PlaceHolder 2"/>
           <p:cNvSpPr>
             <a:spLocks noGrp="1"/>
           </p:cNvSpPr>
@@ -635,7 +648,7 @@
         <p:spPr>
           <a:xfrm>
             <a:off x="685800" y="4400640"/>
-            <a:ext cx="5486040" cy="3600000"/>
+            <a:ext cx="5485680" cy="3599640"/>
           </a:xfrm>
           <a:prstGeom prst="rect">
             <a:avLst/>
@@ -655,6 +668,9 @@
                 <a:spcPct val="100000"/>
               </a:lnSpc>
               <a:buNone/>
+              <a:tabLst>
+                <a:tab pos="0" algn="l"/>
+              </a:tabLst>
             </a:pPr>
             <a:r>
               <a:rPr lang="en-US" sz="2000" b="0" u="none" strike="noStrike">
@@ -680,7 +696,7 @@
       </p:sp>
       <p:sp>
         <p:nvSpPr>
-          <p:cNvPr id="79" name="PlaceHolder 3"/>
+          <p:cNvPr id="81" name="PlaceHolder 3"/>
           <p:cNvSpPr>
             <a:spLocks noGrp="1"/>
           </p:cNvSpPr>
@@ -691,7 +707,7 @@
         <p:spPr>
           <a:xfrm>
             <a:off x="3884760" y="8685360"/>
-            <a:ext cx="2971440" cy="458280"/>
+            <a:ext cx="2971080" cy="457920"/>
           </a:xfrm>
           <a:prstGeom prst="rect">
             <a:avLst/>
@@ -711,6 +727,9 @@
                 <a:spcPct val="100000"/>
               </a:lnSpc>
               <a:buNone/>
+              <a:tabLst>
+                <a:tab pos="0" algn="l"/>
+              </a:tabLst>
               <a:defRPr lang="en-AU" sz="1200" b="0" u="none" strike="noStrike">
                 <a:solidFill>
                   <a:srgbClr val="000000"/>
@@ -727,8 +746,11 @@
                 <a:spcPct val="100000"/>
               </a:lnSpc>
               <a:buNone/>
-            </a:pPr>
-            <a:fld id="{C0566C15-AA8A-4430-B897-B6EB7E012E75}" type="slidenum">
+              <a:tabLst>
+                <a:tab pos="0" algn="l"/>
+              </a:tabLst>
+            </a:pPr>
+            <a:fld id="{47FE9B55-2027-40DD-A77C-59DD8E5D4C57}" type="slidenum">
               <a:rPr lang="en-AU" sz="1200" b="0" u="none" strike="noStrike">
                 <a:solidFill>
                   <a:srgbClr val="000000"/>
@@ -774,7 +796,7 @@
       </p:grpSpPr>
       <p:sp>
         <p:nvSpPr>
-          <p:cNvPr id="80" name="PlaceHolder 1"/>
+          <p:cNvPr id="82" name="PlaceHolder 1"/>
           <p:cNvSpPr>
             <a:spLocks noGrp="1"/>
           </p:cNvSpPr>
@@ -785,7 +807,7 @@
         <p:spPr>
           <a:xfrm>
             <a:off x="685800" y="1143000"/>
-            <a:ext cx="5486040" cy="3085920"/>
+            <a:ext cx="5485680" cy="3085560"/>
           </a:xfrm>
           <a:prstGeom prst="rect">
             <a:avLst/>
@@ -797,7 +819,7 @@
       </p:sp>
       <p:sp>
         <p:nvSpPr>
-          <p:cNvPr id="81" name="PlaceHolder 2"/>
+          <p:cNvPr id="83" name="PlaceHolder 2"/>
           <p:cNvSpPr>
             <a:spLocks noGrp="1"/>
           </p:cNvSpPr>
@@ -808,7 +830,7 @@
         <p:spPr>
           <a:xfrm>
             <a:off x="685800" y="4400640"/>
-            <a:ext cx="5486040" cy="3600000"/>
+            <a:ext cx="5485680" cy="3599640"/>
           </a:xfrm>
           <a:prstGeom prst="rect">
             <a:avLst/>
@@ -828,6 +850,9 @@
                 <a:spcPct val="100000"/>
               </a:lnSpc>
               <a:buNone/>
+              <a:tabLst>
+                <a:tab pos="0" algn="l"/>
+              </a:tabLst>
             </a:pPr>
             <a:r>
               <a:rPr lang="en-US" sz="2000" b="0" u="none" strike="noStrike">
@@ -853,7 +878,7 @@
       </p:sp>
       <p:sp>
         <p:nvSpPr>
-          <p:cNvPr id="82" name="PlaceHolder 3"/>
+          <p:cNvPr id="84" name="PlaceHolder 3"/>
           <p:cNvSpPr>
             <a:spLocks noGrp="1"/>
           </p:cNvSpPr>
@@ -864,7 +889,7 @@
         <p:spPr>
           <a:xfrm>
             <a:off x="3884760" y="8685360"/>
-            <a:ext cx="2971440" cy="458280"/>
+            <a:ext cx="2971080" cy="457920"/>
           </a:xfrm>
           <a:prstGeom prst="rect">
             <a:avLst/>
@@ -884,6 +909,9 @@
                 <a:spcPct val="100000"/>
               </a:lnSpc>
               <a:buNone/>
+              <a:tabLst>
+                <a:tab pos="0" algn="l"/>
+              </a:tabLst>
               <a:defRPr lang="en-AU" sz="1200" b="0" u="none" strike="noStrike">
                 <a:solidFill>
                   <a:srgbClr val="000000"/>
@@ -900,8 +928,11 @@
                 <a:spcPct val="100000"/>
               </a:lnSpc>
               <a:buNone/>
-            </a:pPr>
-            <a:fld id="{F90A06E7-41BD-4DED-9B07-03FDF3F27355}" type="slidenum">
+              <a:tabLst>
+                <a:tab pos="0" algn="l"/>
+              </a:tabLst>
+            </a:pPr>
+            <a:fld id="{6868722F-9F3F-4C18-9EBF-CED35BDF532A}" type="slidenum">
               <a:rPr lang="en-AU" sz="1200" b="0" u="none" strike="noStrike">
                 <a:solidFill>
                   <a:srgbClr val="000000"/>
@@ -947,7 +978,7 @@
       </p:grpSpPr>
       <p:sp>
         <p:nvSpPr>
-          <p:cNvPr id="83" name="PlaceHolder 1"/>
+          <p:cNvPr id="85" name="PlaceHolder 1"/>
           <p:cNvSpPr>
             <a:spLocks noGrp="1"/>
           </p:cNvSpPr>
@@ -958,7 +989,7 @@
         <p:spPr>
           <a:xfrm>
             <a:off x="685800" y="1143000"/>
-            <a:ext cx="5486040" cy="3085920"/>
+            <a:ext cx="5485680" cy="3085560"/>
           </a:xfrm>
           <a:prstGeom prst="rect">
             <a:avLst/>
@@ -970,7 +1001,7 @@
       </p:sp>
       <p:sp>
         <p:nvSpPr>
-          <p:cNvPr id="84" name="PlaceHolder 2"/>
+          <p:cNvPr id="86" name="PlaceHolder 2"/>
           <p:cNvSpPr>
             <a:spLocks noGrp="1"/>
           </p:cNvSpPr>
@@ -981,7 +1012,7 @@
         <p:spPr>
           <a:xfrm>
             <a:off x="685800" y="4400640"/>
-            <a:ext cx="5486040" cy="3600000"/>
+            <a:ext cx="5485680" cy="3599640"/>
           </a:xfrm>
           <a:prstGeom prst="rect">
             <a:avLst/>
@@ -1001,6 +1032,9 @@
                 <a:spcPct val="100000"/>
               </a:lnSpc>
               <a:buNone/>
+              <a:tabLst>
+                <a:tab pos="0" algn="l"/>
+              </a:tabLst>
             </a:pPr>
             <a:r>
               <a:rPr lang="en-US" sz="2000" b="0" u="none" strike="noStrike">
@@ -1026,7 +1060,7 @@
       </p:sp>
       <p:sp>
         <p:nvSpPr>
-          <p:cNvPr id="85" name="PlaceHolder 3"/>
+          <p:cNvPr id="87" name="PlaceHolder 3"/>
           <p:cNvSpPr>
             <a:spLocks noGrp="1"/>
           </p:cNvSpPr>
@@ -1037,7 +1071,7 @@
         <p:spPr>
           <a:xfrm>
             <a:off x="3884760" y="8685360"/>
-            <a:ext cx="2971440" cy="458280"/>
+            <a:ext cx="2971080" cy="457920"/>
           </a:xfrm>
           <a:prstGeom prst="rect">
             <a:avLst/>
@@ -1057,6 +1091,9 @@
                 <a:spcPct val="100000"/>
               </a:lnSpc>
               <a:buNone/>
+              <a:tabLst>
+                <a:tab pos="0" algn="l"/>
+              </a:tabLst>
               <a:defRPr lang="en-AU" sz="1200" b="0" u="none" strike="noStrike">
                 <a:solidFill>
                   <a:srgbClr val="000000"/>
@@ -1073,8 +1110,193 @@
                 <a:spcPct val="100000"/>
               </a:lnSpc>
               <a:buNone/>
-            </a:pPr>
-            <a:fld id="{1300804B-AFE1-46AE-B74F-F10DD14E39A6}" type="slidenum">
+              <a:tabLst>
+                <a:tab pos="0" algn="l"/>
+              </a:tabLst>
+            </a:pPr>
+            <a:fld id="{FC8FA0F5-CCA2-4675-BB82-E9839C377377}" type="slidenum">
+              <a:rPr lang="en-AU" sz="1200" b="0" u="none" strike="noStrike">
+                <a:solidFill>
+                  <a:srgbClr val="000000"/>
+                </a:solidFill>
+                <a:effectLst/>
+                <a:uFillTx/>
+                <a:latin typeface="Times New Roman"/>
+              </a:rPr>
+              <a:t>&lt;number&gt;</a:t>
+            </a:fld>
+            <a:endParaRPr lang="en-AU" sz="1200" b="0" u="none" strike="noStrike">
+              <a:solidFill>
+                <a:srgbClr val="000000"/>
+              </a:solidFill>
+              <a:effectLst/>
+              <a:uFillTx/>
+              <a:latin typeface="Times New Roman"/>
+            </a:endParaRPr>
+          </a:p>
+        </p:txBody>
+      </p:sp>
+    </p:spTree>
+  </p:cSld>
+</p:notes>
+</file>
+
+<file path=ppt/notesSlides/notesSlide14.xml><?xml version="1.0" encoding="utf-8"?>
+<p:notes xmlns:a="http://schemas.openxmlformats.org/drawingml/2006/main" xmlns:p="http://schemas.openxmlformats.org/presentationml/2006/main" xmlns:r="http://schemas.openxmlformats.org/officeDocument/2006/relationships" xmlns:p14="http://schemas.microsoft.com/office/powerpoint/2010/main" xmlns:p15="http://schemas.microsoft.com/office/powerpoint/2012/main" xmlns:mc="http://schemas.openxmlformats.org/markup-compatibility/2006">
+  <p:cSld>
+    <p:spTree>
+      <p:nvGrpSpPr>
+        <p:cNvPr id="1" name=""/>
+        <p:cNvGrpSpPr/>
+        <p:nvPr/>
+      </p:nvGrpSpPr>
+      <p:grpSpPr>
+        <a:xfrm>
+          <a:off x="0" y="0"/>
+          <a:ext cx="0" cy="0"/>
+          <a:chOff x="0" y="0"/>
+          <a:chExt cx="0" cy="0"/>
+        </a:xfrm>
+      </p:grpSpPr>
+      <p:sp>
+        <p:nvSpPr>
+          <p:cNvPr id="88" name="PlaceHolder 1"/>
+          <p:cNvSpPr>
+            <a:spLocks noGrp="1"/>
+          </p:cNvSpPr>
+          <p:nvPr>
+            <p:ph type="sldImg"/>
+          </p:nvPr>
+        </p:nvSpPr>
+        <p:spPr>
+          <a:xfrm>
+            <a:off x="685800" y="1143000"/>
+            <a:ext cx="5485680" cy="3085560"/>
+          </a:xfrm>
+          <a:prstGeom prst="rect">
+            <a:avLst/>
+          </a:prstGeom>
+          <a:ln w="0">
+            <a:noFill/>
+          </a:ln>
+        </p:spPr>
+      </p:sp>
+      <p:sp>
+        <p:nvSpPr>
+          <p:cNvPr id="89" name="PlaceHolder 2"/>
+          <p:cNvSpPr>
+            <a:spLocks noGrp="1"/>
+          </p:cNvSpPr>
+          <p:nvPr>
+            <p:ph type="body"/>
+          </p:nvPr>
+        </p:nvSpPr>
+        <p:spPr>
+          <a:xfrm>
+            <a:off x="685800" y="4400640"/>
+            <a:ext cx="5485680" cy="3599640"/>
+          </a:xfrm>
+          <a:prstGeom prst="rect">
+            <a:avLst/>
+          </a:prstGeom>
+          <a:noFill/>
+          <a:ln w="0">
+            <a:noFill/>
+          </a:ln>
+        </p:spPr>
+        <p:txBody>
+          <a:bodyPr lIns="91440" tIns="45720" rIns="91440" bIns="45720" anchor="t">
+            <a:noAutofit/>
+          </a:bodyPr>
+          <a:p>
+            <a:pPr indent="0" algn="l">
+              <a:lnSpc>
+                <a:spcPct val="100000"/>
+              </a:lnSpc>
+              <a:buNone/>
+              <a:tabLst>
+                <a:tab pos="0" algn="l"/>
+              </a:tabLst>
+            </a:pPr>
+            <a:r>
+              <a:rPr lang="en-US" sz="2000" b="0" u="none" strike="noStrike">
+                <a:solidFill>
+                  <a:srgbClr val="000000"/>
+                </a:solidFill>
+                <a:effectLst/>
+                <a:uFillTx/>
+                <a:latin typeface="Arial"/>
+              </a:rPr>
+              <a:t>RFC 1654 for BGP-4 and RFC 1655 defines ‘Application of the BGP in the Internet’</a:t>
+            </a:r>
+            <a:endParaRPr lang="en-AU" sz="2000" b="0" u="none" strike="noStrike">
+              <a:solidFill>
+                <a:srgbClr val="000000"/>
+              </a:solidFill>
+              <a:effectLst/>
+              <a:uFillTx/>
+              <a:latin typeface="Arial"/>
+            </a:endParaRPr>
+          </a:p>
+        </p:txBody>
+      </p:sp>
+      <p:sp>
+        <p:nvSpPr>
+          <p:cNvPr id="90" name="PlaceHolder 3"/>
+          <p:cNvSpPr>
+            <a:spLocks noGrp="1"/>
+          </p:cNvSpPr>
+          <p:nvPr>
+            <p:ph type="sldNum" idx="22"/>
+          </p:nvPr>
+        </p:nvSpPr>
+        <p:spPr>
+          <a:xfrm>
+            <a:off x="3884760" y="8685360"/>
+            <a:ext cx="2971080" cy="457920"/>
+          </a:xfrm>
+          <a:prstGeom prst="rect">
+            <a:avLst/>
+          </a:prstGeom>
+          <a:noFill/>
+          <a:ln w="0">
+            <a:noFill/>
+          </a:ln>
+        </p:spPr>
+        <p:txBody>
+          <a:bodyPr lIns="91440" tIns="45720" rIns="91440" bIns="45720" anchor="b">
+            <a:noAutofit/>
+          </a:bodyPr>
+          <a:lstStyle>
+            <a:lvl1pPr indent="0" algn="r">
+              <a:lnSpc>
+                <a:spcPct val="100000"/>
+              </a:lnSpc>
+              <a:buNone/>
+              <a:tabLst>
+                <a:tab pos="0" algn="l"/>
+              </a:tabLst>
+              <a:defRPr lang="en-AU" sz="1200" b="0" u="none" strike="noStrike">
+                <a:solidFill>
+                  <a:srgbClr val="000000"/>
+                </a:solidFill>
+                <a:effectLst/>
+                <a:uFillTx/>
+                <a:latin typeface="Times New Roman"/>
+              </a:defRPr>
+            </a:lvl1pPr>
+          </a:lstStyle>
+          <a:p>
+            <a:pPr indent="0" algn="r">
+              <a:lnSpc>
+                <a:spcPct val="100000"/>
+              </a:lnSpc>
+              <a:buNone/>
+              <a:tabLst>
+                <a:tab pos="0" algn="l"/>
+              </a:tabLst>
+            </a:pPr>
+            <a:fld id="{D1471D97-3C4A-472B-9479-7B54FBD4E731}" type="slidenum">
               <a:rPr lang="en-AU" sz="1200" b="0" u="none" strike="noStrike">
                 <a:solidFill>
                   <a:srgbClr val="000000"/>
@@ -1120,7 +1342,7 @@
       </p:grpSpPr>
       <p:sp>
         <p:nvSpPr>
-          <p:cNvPr id="50" name="PlaceHolder 1"/>
+          <p:cNvPr id="52" name="PlaceHolder 1"/>
           <p:cNvSpPr>
             <a:spLocks noGrp="1"/>
           </p:cNvSpPr>
@@ -1131,7 +1353,7 @@
         <p:spPr>
           <a:xfrm>
             <a:off x="685800" y="1143000"/>
-            <a:ext cx="5486040" cy="3085920"/>
+            <a:ext cx="5485680" cy="3085560"/>
           </a:xfrm>
           <a:prstGeom prst="rect">
             <a:avLst/>
@@ -1143,7 +1365,7 @@
       </p:sp>
       <p:sp>
         <p:nvSpPr>
-          <p:cNvPr id="51" name="PlaceHolder 2"/>
+          <p:cNvPr id="53" name="PlaceHolder 2"/>
           <p:cNvSpPr>
             <a:spLocks noGrp="1"/>
           </p:cNvSpPr>
@@ -1154,7 +1376,7 @@
         <p:spPr>
           <a:xfrm>
             <a:off x="685800" y="4400640"/>
-            <a:ext cx="5486040" cy="3600000"/>
+            <a:ext cx="5485680" cy="3599640"/>
           </a:xfrm>
           <a:prstGeom prst="rect">
             <a:avLst/>
@@ -1174,6 +1396,9 @@
                 <a:spcPct val="100000"/>
               </a:lnSpc>
               <a:buNone/>
+              <a:tabLst>
+                <a:tab pos="0" algn="l"/>
+              </a:tabLst>
             </a:pPr>
             <a:r>
               <a:rPr lang="en-US" sz="2000" b="0" u="none" strike="noStrike">
@@ -1201,6 +1426,9 @@
                 <a:spcPct val="100000"/>
               </a:lnSpc>
               <a:buNone/>
+              <a:tabLst>
+                <a:tab pos="0" algn="l"/>
+              </a:tabLst>
             </a:pPr>
             <a:r>
               <a:rPr lang="en-US" sz="2000" b="0" u="sng" strike="noStrike">
@@ -1238,7 +1466,7 @@
       </p:sp>
       <p:sp>
         <p:nvSpPr>
-          <p:cNvPr id="52" name="PlaceHolder 3"/>
+          <p:cNvPr id="54" name="PlaceHolder 3"/>
           <p:cNvSpPr>
             <a:spLocks noGrp="1"/>
           </p:cNvSpPr>
@@ -1249,7 +1477,7 @@
         <p:spPr>
           <a:xfrm>
             <a:off x="3884760" y="8685360"/>
-            <a:ext cx="2971440" cy="458280"/>
+            <a:ext cx="2971080" cy="457920"/>
           </a:xfrm>
           <a:prstGeom prst="rect">
             <a:avLst/>
@@ -1269,6 +1497,9 @@
                 <a:spcPct val="100000"/>
               </a:lnSpc>
               <a:buNone/>
+              <a:tabLst>
+                <a:tab pos="0" algn="l"/>
+              </a:tabLst>
               <a:defRPr lang="en-AU" sz="1200" b="0" u="none" strike="noStrike">
                 <a:solidFill>
                   <a:srgbClr val="000000"/>
@@ -1285,8 +1516,11 @@
                 <a:spcPct val="100000"/>
               </a:lnSpc>
               <a:buNone/>
-            </a:pPr>
-            <a:fld id="{9F15481F-7A11-4398-BFB0-C741A4014AA8}" type="slidenum">
+              <a:tabLst>
+                <a:tab pos="0" algn="l"/>
+              </a:tabLst>
+            </a:pPr>
+            <a:fld id="{4553FF32-E65A-46A0-A326-F5617CB6A92B}" type="slidenum">
               <a:rPr lang="en-AU" sz="1200" b="0" u="none" strike="noStrike">
                 <a:solidFill>
                   <a:srgbClr val="000000"/>
@@ -1295,7 +1529,7 @@
                 <a:uFillTx/>
                 <a:latin typeface="Times New Roman"/>
               </a:rPr>
-              <a:t>13</a:t>
+              <a:t>&lt;number&gt;</a:t>
             </a:fld>
             <a:endParaRPr lang="en-AU" sz="1200" b="0" u="none" strike="noStrike">
               <a:solidFill>
@@ -1332,7 +1566,7 @@
       </p:grpSpPr>
       <p:sp>
         <p:nvSpPr>
-          <p:cNvPr id="53" name="PlaceHolder 1"/>
+          <p:cNvPr id="55" name="PlaceHolder 1"/>
           <p:cNvSpPr>
             <a:spLocks noGrp="1"/>
           </p:cNvSpPr>
@@ -1343,7 +1577,7 @@
         <p:spPr>
           <a:xfrm>
             <a:off x="685800" y="1143000"/>
-            <a:ext cx="5486040" cy="3085920"/>
+            <a:ext cx="5485680" cy="3085560"/>
           </a:xfrm>
           <a:prstGeom prst="rect">
             <a:avLst/>
@@ -1355,7 +1589,7 @@
       </p:sp>
       <p:sp>
         <p:nvSpPr>
-          <p:cNvPr id="54" name="PlaceHolder 2"/>
+          <p:cNvPr id="56" name="PlaceHolder 2"/>
           <p:cNvSpPr>
             <a:spLocks noGrp="1"/>
           </p:cNvSpPr>
@@ -1366,7 +1600,7 @@
         <p:spPr>
           <a:xfrm>
             <a:off x="685800" y="4400640"/>
-            <a:ext cx="5486040" cy="3600000"/>
+            <a:ext cx="5485680" cy="3599640"/>
           </a:xfrm>
           <a:prstGeom prst="rect">
             <a:avLst/>
@@ -1386,6 +1620,9 @@
                 <a:spcPct val="100000"/>
               </a:lnSpc>
               <a:buNone/>
+              <a:tabLst>
+                <a:tab pos="0" algn="l"/>
+              </a:tabLst>
             </a:pPr>
             <a:r>
               <a:rPr lang="en-US" sz="2000" b="0" u="none" strike="noStrike">
@@ -1411,7 +1648,7 @@
       </p:sp>
       <p:sp>
         <p:nvSpPr>
-          <p:cNvPr id="55" name="PlaceHolder 3"/>
+          <p:cNvPr id="57" name="PlaceHolder 3"/>
           <p:cNvSpPr>
             <a:spLocks noGrp="1"/>
           </p:cNvSpPr>
@@ -1422,7 +1659,7 @@
         <p:spPr>
           <a:xfrm>
             <a:off x="3884760" y="8685360"/>
-            <a:ext cx="2971440" cy="458280"/>
+            <a:ext cx="2971080" cy="457920"/>
           </a:xfrm>
           <a:prstGeom prst="rect">
             <a:avLst/>
@@ -1442,6 +1679,9 @@
                 <a:spcPct val="100000"/>
               </a:lnSpc>
               <a:buNone/>
+              <a:tabLst>
+                <a:tab pos="0" algn="l"/>
+              </a:tabLst>
               <a:defRPr lang="en-AU" sz="1200" b="0" u="none" strike="noStrike">
                 <a:solidFill>
                   <a:srgbClr val="000000"/>
@@ -1458,8 +1698,11 @@
                 <a:spcPct val="100000"/>
               </a:lnSpc>
               <a:buNone/>
-            </a:pPr>
-            <a:fld id="{1A446B16-A545-4412-929A-B177F5FE473D}" type="slidenum">
+              <a:tabLst>
+                <a:tab pos="0" algn="l"/>
+              </a:tabLst>
+            </a:pPr>
+            <a:fld id="{50F1E18C-B1A1-4712-A4BF-DCD2BFA30045}" type="slidenum">
               <a:rPr lang="en-AU" sz="1200" b="0" u="none" strike="noStrike">
                 <a:solidFill>
                   <a:srgbClr val="000000"/>
@@ -1468,7 +1711,7 @@
                 <a:uFillTx/>
                 <a:latin typeface="Times New Roman"/>
               </a:rPr>
-              <a:t>13</a:t>
+              <a:t>&lt;number&gt;</a:t>
             </a:fld>
             <a:endParaRPr lang="en-AU" sz="1200" b="0" u="none" strike="noStrike">
               <a:solidFill>
@@ -1505,7 +1748,7 @@
       </p:grpSpPr>
       <p:sp>
         <p:nvSpPr>
-          <p:cNvPr id="56" name="PlaceHolder 1"/>
+          <p:cNvPr id="58" name="PlaceHolder 1"/>
           <p:cNvSpPr>
             <a:spLocks noGrp="1"/>
           </p:cNvSpPr>
@@ -1516,7 +1759,7 @@
         <p:spPr>
           <a:xfrm>
             <a:off x="685800" y="1143000"/>
-            <a:ext cx="5486040" cy="3085920"/>
+            <a:ext cx="5485680" cy="3085560"/>
           </a:xfrm>
           <a:prstGeom prst="rect">
             <a:avLst/>
@@ -1528,7 +1771,7 @@
       </p:sp>
       <p:sp>
         <p:nvSpPr>
-          <p:cNvPr id="57" name="PlaceHolder 2"/>
+          <p:cNvPr id="59" name="PlaceHolder 2"/>
           <p:cNvSpPr>
             <a:spLocks noGrp="1"/>
           </p:cNvSpPr>
@@ -1539,7 +1782,7 @@
         <p:spPr>
           <a:xfrm>
             <a:off x="685800" y="4400640"/>
-            <a:ext cx="5486040" cy="3600000"/>
+            <a:ext cx="5485680" cy="3599640"/>
           </a:xfrm>
           <a:prstGeom prst="rect">
             <a:avLst/>
@@ -1559,6 +1802,9 @@
                 <a:spcPct val="100000"/>
               </a:lnSpc>
               <a:buNone/>
+              <a:tabLst>
+                <a:tab pos="0" algn="l"/>
+              </a:tabLst>
             </a:pPr>
             <a:r>
               <a:rPr lang="en-US" sz="2000" b="0" u="none" strike="noStrike">
@@ -1584,7 +1830,7 @@
       </p:sp>
       <p:sp>
         <p:nvSpPr>
-          <p:cNvPr id="58" name="PlaceHolder 3"/>
+          <p:cNvPr id="60" name="PlaceHolder 3"/>
           <p:cNvSpPr>
             <a:spLocks noGrp="1"/>
           </p:cNvSpPr>
@@ -1595,7 +1841,7 @@
         <p:spPr>
           <a:xfrm>
             <a:off x="3884760" y="8685360"/>
-            <a:ext cx="2971440" cy="458280"/>
+            <a:ext cx="2971080" cy="457920"/>
           </a:xfrm>
           <a:prstGeom prst="rect">
             <a:avLst/>
@@ -1615,6 +1861,9 @@
                 <a:spcPct val="100000"/>
               </a:lnSpc>
               <a:buNone/>
+              <a:tabLst>
+                <a:tab pos="0" algn="l"/>
+              </a:tabLst>
               <a:defRPr lang="en-AU" sz="1200" b="0" u="none" strike="noStrike">
                 <a:solidFill>
                   <a:srgbClr val="000000"/>
@@ -1631,8 +1880,11 @@
                 <a:spcPct val="100000"/>
               </a:lnSpc>
               <a:buNone/>
-            </a:pPr>
-            <a:fld id="{E54E6B8E-76DB-4B2F-89EF-7D9F4A85085E}" type="slidenum">
+              <a:tabLst>
+                <a:tab pos="0" algn="l"/>
+              </a:tabLst>
+            </a:pPr>
+            <a:fld id="{ED351EA6-8175-4F7C-BB82-4A557E56831E}" type="slidenum">
               <a:rPr lang="en-AU" sz="1200" b="0" u="none" strike="noStrike">
                 <a:solidFill>
                   <a:srgbClr val="000000"/>
@@ -1641,7 +1893,7 @@
                 <a:uFillTx/>
                 <a:latin typeface="Times New Roman"/>
               </a:rPr>
-              <a:t>13</a:t>
+              <a:t>&lt;number&gt;</a:t>
             </a:fld>
             <a:endParaRPr lang="en-AU" sz="1200" b="0" u="none" strike="noStrike">
               <a:solidFill>
@@ -1678,7 +1930,7 @@
       </p:grpSpPr>
       <p:sp>
         <p:nvSpPr>
-          <p:cNvPr id="59" name="PlaceHolder 1"/>
+          <p:cNvPr id="61" name="PlaceHolder 1"/>
           <p:cNvSpPr>
             <a:spLocks noGrp="1"/>
           </p:cNvSpPr>
@@ -1689,7 +1941,7 @@
         <p:spPr>
           <a:xfrm>
             <a:off x="685800" y="1143000"/>
-            <a:ext cx="5486040" cy="3085920"/>
+            <a:ext cx="5485680" cy="3085560"/>
           </a:xfrm>
           <a:prstGeom prst="rect">
             <a:avLst/>
@@ -1701,7 +1953,7 @@
       </p:sp>
       <p:sp>
         <p:nvSpPr>
-          <p:cNvPr id="60" name="PlaceHolder 2"/>
+          <p:cNvPr id="62" name="PlaceHolder 2"/>
           <p:cNvSpPr>
             <a:spLocks noGrp="1"/>
           </p:cNvSpPr>
@@ -1712,7 +1964,7 @@
         <p:spPr>
           <a:xfrm>
             <a:off x="685800" y="4400640"/>
-            <a:ext cx="5486040" cy="3600000"/>
+            <a:ext cx="5485680" cy="3599640"/>
           </a:xfrm>
           <a:prstGeom prst="rect">
             <a:avLst/>
@@ -1732,6 +1984,9 @@
                 <a:spcPct val="100000"/>
               </a:lnSpc>
               <a:buNone/>
+              <a:tabLst>
+                <a:tab pos="0" algn="l"/>
+              </a:tabLst>
             </a:pPr>
             <a:r>
               <a:rPr lang="en-US" sz="2000" b="0" u="none" strike="noStrike">
@@ -1757,7 +2012,7 @@
       </p:sp>
       <p:sp>
         <p:nvSpPr>
-          <p:cNvPr id="61" name="PlaceHolder 3"/>
+          <p:cNvPr id="63" name="PlaceHolder 3"/>
           <p:cNvSpPr>
             <a:spLocks noGrp="1"/>
           </p:cNvSpPr>
@@ -1768,7 +2023,7 @@
         <p:spPr>
           <a:xfrm>
             <a:off x="3884760" y="8685360"/>
-            <a:ext cx="2971440" cy="458280"/>
+            <a:ext cx="2971080" cy="457920"/>
           </a:xfrm>
           <a:prstGeom prst="rect">
             <a:avLst/>
@@ -1788,6 +2043,9 @@
                 <a:spcPct val="100000"/>
               </a:lnSpc>
               <a:buNone/>
+              <a:tabLst>
+                <a:tab pos="0" algn="l"/>
+              </a:tabLst>
               <a:defRPr lang="en-AU" sz="1200" b="0" u="none" strike="noStrike">
                 <a:solidFill>
                   <a:srgbClr val="000000"/>
@@ -1804,8 +2062,11 @@
                 <a:spcPct val="100000"/>
               </a:lnSpc>
               <a:buNone/>
-            </a:pPr>
-            <a:fld id="{3BB1F10A-D934-47D7-B7E3-42A28CC8FD39}" type="slidenum">
+              <a:tabLst>
+                <a:tab pos="0" algn="l"/>
+              </a:tabLst>
+            </a:pPr>
+            <a:fld id="{055460C5-5DF2-4973-9D65-7BD4290102C3}" type="slidenum">
               <a:rPr lang="en-AU" sz="1200" b="0" u="none" strike="noStrike">
                 <a:solidFill>
                   <a:srgbClr val="000000"/>
@@ -1814,7 +2075,7 @@
                 <a:uFillTx/>
                 <a:latin typeface="Times New Roman"/>
               </a:rPr>
-              <a:t>13</a:t>
+              <a:t>&lt;number&gt;</a:t>
             </a:fld>
             <a:endParaRPr lang="en-AU" sz="1200" b="0" u="none" strike="noStrike">
               <a:solidFill>
@@ -1851,7 +2112,7 @@
       </p:grpSpPr>
       <p:sp>
         <p:nvSpPr>
-          <p:cNvPr id="62" name="PlaceHolder 1"/>
+          <p:cNvPr id="64" name="PlaceHolder 1"/>
           <p:cNvSpPr>
             <a:spLocks noGrp="1"/>
           </p:cNvSpPr>
@@ -1862,7 +2123,7 @@
         <p:spPr>
           <a:xfrm>
             <a:off x="685800" y="1143000"/>
-            <a:ext cx="5486040" cy="3085920"/>
+            <a:ext cx="5485680" cy="3085560"/>
           </a:xfrm>
           <a:prstGeom prst="rect">
             <a:avLst/>
@@ -1874,7 +2135,7 @@
       </p:sp>
       <p:sp>
         <p:nvSpPr>
-          <p:cNvPr id="63" name="PlaceHolder 2"/>
+          <p:cNvPr id="65" name="PlaceHolder 2"/>
           <p:cNvSpPr>
             <a:spLocks noGrp="1"/>
           </p:cNvSpPr>
@@ -1885,7 +2146,7 @@
         <p:spPr>
           <a:xfrm>
             <a:off x="685800" y="4400640"/>
-            <a:ext cx="5486040" cy="3600000"/>
+            <a:ext cx="5485680" cy="3599640"/>
           </a:xfrm>
           <a:prstGeom prst="rect">
             <a:avLst/>
@@ -1905,6 +2166,9 @@
                 <a:spcPct val="100000"/>
               </a:lnSpc>
               <a:buNone/>
+              <a:tabLst>
+                <a:tab pos="0" algn="l"/>
+              </a:tabLst>
             </a:pPr>
             <a:r>
               <a:rPr lang="en-US" sz="2000" b="0" u="none" strike="noStrike">
@@ -1930,7 +2194,7 @@
       </p:sp>
       <p:sp>
         <p:nvSpPr>
-          <p:cNvPr id="64" name="PlaceHolder 3"/>
+          <p:cNvPr id="66" name="PlaceHolder 3"/>
           <p:cNvSpPr>
             <a:spLocks noGrp="1"/>
           </p:cNvSpPr>
@@ -1941,7 +2205,7 @@
         <p:spPr>
           <a:xfrm>
             <a:off x="3884760" y="8685360"/>
-            <a:ext cx="2971440" cy="458280"/>
+            <a:ext cx="2971080" cy="457920"/>
           </a:xfrm>
           <a:prstGeom prst="rect">
             <a:avLst/>
@@ -1961,6 +2225,9 @@
                 <a:spcPct val="100000"/>
               </a:lnSpc>
               <a:buNone/>
+              <a:tabLst>
+                <a:tab pos="0" algn="l"/>
+              </a:tabLst>
               <a:defRPr lang="en-AU" sz="1200" b="0" u="none" strike="noStrike">
                 <a:solidFill>
                   <a:srgbClr val="000000"/>
@@ -1977,8 +2244,11 @@
                 <a:spcPct val="100000"/>
               </a:lnSpc>
               <a:buNone/>
-            </a:pPr>
-            <a:fld id="{876FB827-4F17-43E6-B50B-B267F9F5C875}" type="slidenum">
+              <a:tabLst>
+                <a:tab pos="0" algn="l"/>
+              </a:tabLst>
+            </a:pPr>
+            <a:fld id="{6D5F3F90-3E53-4269-85D5-11E800B15FB3}" type="slidenum">
               <a:rPr lang="en-AU" sz="1200" b="0" u="none" strike="noStrike">
                 <a:solidFill>
                   <a:srgbClr val="000000"/>
@@ -1987,7 +2257,7 @@
                 <a:uFillTx/>
                 <a:latin typeface="Times New Roman"/>
               </a:rPr>
-              <a:t>13</a:t>
+              <a:t>&lt;number&gt;</a:t>
             </a:fld>
             <a:endParaRPr lang="en-AU" sz="1200" b="0" u="none" strike="noStrike">
               <a:solidFill>
@@ -2024,7 +2294,7 @@
       </p:grpSpPr>
       <p:sp>
         <p:nvSpPr>
-          <p:cNvPr id="65" name="PlaceHolder 1"/>
+          <p:cNvPr id="67" name="PlaceHolder 1"/>
           <p:cNvSpPr>
             <a:spLocks noGrp="1"/>
           </p:cNvSpPr>
@@ -2035,7 +2305,7 @@
         <p:spPr>
           <a:xfrm>
             <a:off x="685800" y="1143000"/>
-            <a:ext cx="5486040" cy="3085920"/>
+            <a:ext cx="5485680" cy="3085560"/>
           </a:xfrm>
           <a:prstGeom prst="rect">
             <a:avLst/>
@@ -2047,7 +2317,7 @@
       </p:sp>
       <p:sp>
         <p:nvSpPr>
-          <p:cNvPr id="66" name="PlaceHolder 2"/>
+          <p:cNvPr id="68" name="PlaceHolder 2"/>
           <p:cNvSpPr>
             <a:spLocks noGrp="1"/>
           </p:cNvSpPr>
@@ -2058,7 +2328,7 @@
         <p:spPr>
           <a:xfrm>
             <a:off x="685800" y="4400640"/>
-            <a:ext cx="5486040" cy="3600000"/>
+            <a:ext cx="5485680" cy="3599640"/>
           </a:xfrm>
           <a:prstGeom prst="rect">
             <a:avLst/>
@@ -2078,6 +2348,9 @@
                 <a:spcPct val="100000"/>
               </a:lnSpc>
               <a:buNone/>
+              <a:tabLst>
+                <a:tab pos="0" algn="l"/>
+              </a:tabLst>
             </a:pPr>
             <a:r>
               <a:rPr lang="en-US" sz="2000" b="0" u="none" strike="noStrike">
@@ -2103,7 +2376,7 @@
       </p:sp>
       <p:sp>
         <p:nvSpPr>
-          <p:cNvPr id="67" name="PlaceHolder 3"/>
+          <p:cNvPr id="69" name="PlaceHolder 3"/>
           <p:cNvSpPr>
             <a:spLocks noGrp="1"/>
           </p:cNvSpPr>
@@ -2114,7 +2387,7 @@
         <p:spPr>
           <a:xfrm>
             <a:off x="3884760" y="8685360"/>
-            <a:ext cx="2971440" cy="458280"/>
+            <a:ext cx="2971080" cy="457920"/>
           </a:xfrm>
           <a:prstGeom prst="rect">
             <a:avLst/>
@@ -2134,6 +2407,9 @@
                 <a:spcPct val="100000"/>
               </a:lnSpc>
               <a:buNone/>
+              <a:tabLst>
+                <a:tab pos="0" algn="l"/>
+              </a:tabLst>
               <a:defRPr lang="en-AU" sz="1200" b="0" u="none" strike="noStrike">
                 <a:solidFill>
                   <a:srgbClr val="000000"/>
@@ -2150,8 +2426,11 @@
                 <a:spcPct val="100000"/>
               </a:lnSpc>
               <a:buNone/>
-            </a:pPr>
-            <a:fld id="{82DC1306-9E0E-4E3C-A77B-C41115F06D97}" type="slidenum">
+              <a:tabLst>
+                <a:tab pos="0" algn="l"/>
+              </a:tabLst>
+            </a:pPr>
+            <a:fld id="{9BB62F50-561C-4D4C-AEA3-77690E87E26A}" type="slidenum">
               <a:rPr lang="en-AU" sz="1200" b="0" u="none" strike="noStrike">
                 <a:solidFill>
                   <a:srgbClr val="000000"/>
@@ -2160,7 +2439,7 @@
                 <a:uFillTx/>
                 <a:latin typeface="Times New Roman"/>
               </a:rPr>
-              <a:t>13</a:t>
+              <a:t>&lt;number&gt;</a:t>
             </a:fld>
             <a:endParaRPr lang="en-AU" sz="1200" b="0" u="none" strike="noStrike">
               <a:solidFill>
@@ -2197,7 +2476,7 @@
       </p:grpSpPr>
       <p:sp>
         <p:nvSpPr>
-          <p:cNvPr id="68" name="PlaceHolder 1"/>
+          <p:cNvPr id="70" name="PlaceHolder 1"/>
           <p:cNvSpPr>
             <a:spLocks noGrp="1"/>
           </p:cNvSpPr>
@@ -2208,7 +2487,7 @@
         <p:spPr>
           <a:xfrm>
             <a:off x="685800" y="1143000"/>
-            <a:ext cx="5486040" cy="3085920"/>
+            <a:ext cx="5485680" cy="3085560"/>
           </a:xfrm>
           <a:prstGeom prst="rect">
             <a:avLst/>
@@ -2220,7 +2499,7 @@
       </p:sp>
       <p:sp>
         <p:nvSpPr>
-          <p:cNvPr id="69" name="PlaceHolder 2"/>
+          <p:cNvPr id="71" name="PlaceHolder 2"/>
           <p:cNvSpPr>
             <a:spLocks noGrp="1"/>
           </p:cNvSpPr>
@@ -2231,7 +2510,7 @@
         <p:spPr>
           <a:xfrm>
             <a:off x="685800" y="4400640"/>
-            <a:ext cx="5486040" cy="3600000"/>
+            <a:ext cx="5485680" cy="3599640"/>
           </a:xfrm>
           <a:prstGeom prst="rect">
             <a:avLst/>
@@ -2251,6 +2530,9 @@
                 <a:spcPct val="100000"/>
               </a:lnSpc>
               <a:buNone/>
+              <a:tabLst>
+                <a:tab pos="0" algn="l"/>
+              </a:tabLst>
             </a:pPr>
             <a:r>
               <a:rPr lang="en-US" sz="2000" b="0" u="none" strike="noStrike">
@@ -2276,7 +2558,7 @@
       </p:sp>
       <p:sp>
         <p:nvSpPr>
-          <p:cNvPr id="70" name="PlaceHolder 3"/>
+          <p:cNvPr id="72" name="PlaceHolder 3"/>
           <p:cNvSpPr>
             <a:spLocks noGrp="1"/>
           </p:cNvSpPr>
@@ -2287,7 +2569,7 @@
         <p:spPr>
           <a:xfrm>
             <a:off x="3884760" y="8685360"/>
-            <a:ext cx="2971440" cy="458280"/>
+            <a:ext cx="2971080" cy="457920"/>
           </a:xfrm>
           <a:prstGeom prst="rect">
             <a:avLst/>
@@ -2307,6 +2589,9 @@
                 <a:spcPct val="100000"/>
               </a:lnSpc>
               <a:buNone/>
+              <a:tabLst>
+                <a:tab pos="0" algn="l"/>
+              </a:tabLst>
               <a:defRPr lang="en-AU" sz="1200" b="0" u="none" strike="noStrike">
                 <a:solidFill>
                   <a:srgbClr val="000000"/>
@@ -2323,8 +2608,11 @@
                 <a:spcPct val="100000"/>
               </a:lnSpc>
               <a:buNone/>
-            </a:pPr>
-            <a:fld id="{4AF3DE61-80D2-447E-8200-E20FB0EF1EC0}" type="slidenum">
+              <a:tabLst>
+                <a:tab pos="0" algn="l"/>
+              </a:tabLst>
+            </a:pPr>
+            <a:fld id="{CC33235B-9D4C-4806-A6A2-01C5FBE47592}" type="slidenum">
               <a:rPr lang="en-AU" sz="1200" b="0" u="none" strike="noStrike">
                 <a:solidFill>
                   <a:srgbClr val="000000"/>
@@ -2333,7 +2621,7 @@
                 <a:uFillTx/>
                 <a:latin typeface="Times New Roman"/>
               </a:rPr>
-              <a:t>13</a:t>
+              <a:t>&lt;number&gt;</a:t>
             </a:fld>
             <a:endParaRPr lang="en-AU" sz="1200" b="0" u="none" strike="noStrike">
               <a:solidFill>
@@ -2370,7 +2658,7 @@
       </p:grpSpPr>
       <p:sp>
         <p:nvSpPr>
-          <p:cNvPr id="71" name="PlaceHolder 1"/>
+          <p:cNvPr id="73" name="PlaceHolder 1"/>
           <p:cNvSpPr>
             <a:spLocks noGrp="1"/>
           </p:cNvSpPr>
@@ -2381,7 +2669,7 @@
         <p:spPr>
           <a:xfrm>
             <a:off x="685800" y="1143000"/>
-            <a:ext cx="5486040" cy="3085920"/>
+            <a:ext cx="5485680" cy="3085560"/>
           </a:xfrm>
           <a:prstGeom prst="rect">
             <a:avLst/>
@@ -2393,7 +2681,7 @@
       </p:sp>
       <p:sp>
         <p:nvSpPr>
-          <p:cNvPr id="72" name="PlaceHolder 2"/>
+          <p:cNvPr id="74" name="PlaceHolder 2"/>
           <p:cNvSpPr>
             <a:spLocks noGrp="1"/>
           </p:cNvSpPr>
@@ -2404,7 +2692,7 @@
         <p:spPr>
           <a:xfrm>
             <a:off x="685800" y="4400640"/>
-            <a:ext cx="5486040" cy="3600000"/>
+            <a:ext cx="5485680" cy="3599640"/>
           </a:xfrm>
           <a:prstGeom prst="rect">
             <a:avLst/>
@@ -2424,6 +2712,9 @@
                 <a:spcPct val="100000"/>
               </a:lnSpc>
               <a:buNone/>
+              <a:tabLst>
+                <a:tab pos="0" algn="l"/>
+              </a:tabLst>
             </a:pPr>
             <a:r>
               <a:rPr lang="en-US" sz="2000" b="0" u="none" strike="noStrike">
@@ -2449,7 +2740,7 @@
       </p:sp>
       <p:sp>
         <p:nvSpPr>
-          <p:cNvPr id="73" name="PlaceHolder 3"/>
+          <p:cNvPr id="75" name="PlaceHolder 3"/>
           <p:cNvSpPr>
             <a:spLocks noGrp="1"/>
           </p:cNvSpPr>
@@ -2460,7 +2751,7 @@
         <p:spPr>
           <a:xfrm>
             <a:off x="3884760" y="8685360"/>
-            <a:ext cx="2971440" cy="458280"/>
+            <a:ext cx="2971080" cy="457920"/>
           </a:xfrm>
           <a:prstGeom prst="rect">
             <a:avLst/>
@@ -2480,6 +2771,9 @@
                 <a:spcPct val="100000"/>
               </a:lnSpc>
               <a:buNone/>
+              <a:tabLst>
+                <a:tab pos="0" algn="l"/>
+              </a:tabLst>
               <a:defRPr lang="en-AU" sz="1200" b="0" u="none" strike="noStrike">
                 <a:solidFill>
                   <a:srgbClr val="000000"/>
@@ -2496,8 +2790,11 @@
                 <a:spcPct val="100000"/>
               </a:lnSpc>
               <a:buNone/>
-            </a:pPr>
-            <a:fld id="{69F12587-46B4-48D2-9A25-085C4BB4E171}" type="slidenum">
+              <a:tabLst>
+                <a:tab pos="0" algn="l"/>
+              </a:tabLst>
+            </a:pPr>
+            <a:fld id="{D6125482-5339-4C7D-9CA4-A8B1C4CDAD42}" type="slidenum">
               <a:rPr lang="en-AU" sz="1200" b="0" u="none" strike="noStrike">
                 <a:solidFill>
                   <a:srgbClr val="000000"/>
@@ -2506,7 +2803,7 @@
                 <a:uFillTx/>
                 <a:latin typeface="Times New Roman"/>
               </a:rPr>
-              <a:t>13</a:t>
+              <a:t>&lt;number&gt;</a:t>
             </a:fld>
             <a:endParaRPr lang="en-AU" sz="1200" b="0" u="none" strike="noStrike">
               <a:solidFill>
@@ -2561,7 +2858,7 @@
         <p:spPr>
           <a:xfrm>
             <a:off x="838080" y="365040"/>
-            <a:ext cx="10515240" cy="1325160"/>
+            <a:ext cx="10514880" cy="1324800"/>
           </a:xfrm>
           <a:prstGeom prst="rect">
             <a:avLst/>
@@ -2581,6 +2878,9 @@
                 <a:spcPct val="90000"/>
               </a:lnSpc>
               <a:buNone/>
+              <a:tabLst>
+                <a:tab pos="0" algn="l"/>
+              </a:tabLst>
               <a:defRPr lang="en-US" sz="4400" b="0" u="none" strike="noStrike">
                 <a:solidFill>
                   <a:schemeClr val="dk1"/>
@@ -2597,6 +2897,9 @@
                 <a:spcPct val="90000"/>
               </a:lnSpc>
               <a:buNone/>
+              <a:tabLst>
+                <a:tab pos="0" algn="l"/>
+              </a:tabLst>
             </a:pPr>
             <a:r>
               <a:rPr lang="en-US" sz="4400" b="0" u="none" strike="noStrike">
@@ -2633,7 +2936,7 @@
         <p:spPr>
           <a:xfrm>
             <a:off x="838080" y="1825560"/>
-            <a:ext cx="10515240" cy="4350960"/>
+            <a:ext cx="10514880" cy="4350600"/>
           </a:xfrm>
           <a:prstGeom prst="rect">
             <a:avLst/>
@@ -2939,7 +3242,7 @@
         <p:spPr>
           <a:xfrm>
             <a:off x="838080" y="6356520"/>
-            <a:ext cx="2742840" cy="364680"/>
+            <a:ext cx="2742480" cy="364320"/>
           </a:xfrm>
           <a:prstGeom prst="rect">
             <a:avLst/>
@@ -2959,6 +3262,9 @@
                 <a:spcPct val="100000"/>
               </a:lnSpc>
               <a:buNone/>
+              <a:tabLst>
+                <a:tab pos="0" algn="l"/>
+              </a:tabLst>
               <a:defRPr lang="en-AU" sz="1200" b="0" u="none" strike="noStrike">
                 <a:solidFill>
                   <a:schemeClr val="dk1">
@@ -2977,6 +3283,9 @@
                 <a:spcPct val="100000"/>
               </a:lnSpc>
               <a:buNone/>
+              <a:tabLst>
+                <a:tab pos="0" algn="l"/>
+              </a:tabLst>
             </a:pPr>
             <a:r>
               <a:rPr lang="en-AU" sz="1200" b="0" u="none" strike="noStrike">
@@ -2989,7 +3298,7 @@
                 <a:uFillTx/>
                 <a:latin typeface="Aptos"/>
               </a:rPr>
-              <a:t> </a:t>
+              <a:t>&lt;date/time&gt;</a:t>
             </a:r>
             <a:endParaRPr lang="en-AU" sz="1200" b="0" u="none" strike="noStrike">
               <a:solidFill>
@@ -3015,7 +3324,7 @@
         <p:spPr>
           <a:xfrm>
             <a:off x="4038480" y="6356520"/>
-            <a:ext cx="4114440" cy="364680"/>
+            <a:ext cx="4114080" cy="364320"/>
           </a:xfrm>
           <a:prstGeom prst="rect">
             <a:avLst/>
@@ -3031,7 +3340,13 @@
           </a:bodyPr>
           <a:lstStyle>
             <a:lvl1pPr indent="0" algn="ctr">
-              <a:buNone/>
+              <a:lnSpc>
+                <a:spcPct val="100000"/>
+              </a:lnSpc>
+              <a:buNone/>
+              <a:tabLst>
+                <a:tab pos="0" algn="l"/>
+              </a:tabLst>
               <a:defRPr lang="en-AU" sz="1400" b="0" u="none" strike="noStrike">
                 <a:solidFill>
                   <a:srgbClr val="000000"/>
@@ -3044,7 +3359,13 @@
           </a:lstStyle>
           <a:p>
             <a:pPr indent="0" algn="ctr">
-              <a:buNone/>
+              <a:lnSpc>
+                <a:spcPct val="100000"/>
+              </a:lnSpc>
+              <a:buNone/>
+              <a:tabLst>
+                <a:tab pos="0" algn="l"/>
+              </a:tabLst>
             </a:pPr>
             <a:r>
               <a:rPr lang="en-AU" sz="1400" b="0" u="none" strike="noStrike">
@@ -3055,7 +3376,7 @@
                 <a:uFillTx/>
                 <a:latin typeface="Times New Roman"/>
               </a:rPr>
-              <a:t> </a:t>
+              <a:t>&lt;footer&gt;</a:t>
             </a:r>
             <a:endParaRPr lang="en-AU" sz="1400" b="0" u="none" strike="noStrike">
               <a:solidFill>
@@ -3081,7 +3402,7 @@
         <p:spPr>
           <a:xfrm>
             <a:off x="8610480" y="6356520"/>
-            <a:ext cx="2742840" cy="364680"/>
+            <a:ext cx="2742480" cy="364320"/>
           </a:xfrm>
           <a:prstGeom prst="rect">
             <a:avLst/>
@@ -3101,6 +3422,9 @@
                 <a:spcPct val="100000"/>
               </a:lnSpc>
               <a:buNone/>
+              <a:tabLst>
+                <a:tab pos="0" algn="l"/>
+              </a:tabLst>
               <a:defRPr lang="en-AU" sz="1200" b="0" u="none" strike="noStrike">
                 <a:solidFill>
                   <a:schemeClr val="dk1">
@@ -3119,8 +3443,11 @@
                 <a:spcPct val="100000"/>
               </a:lnSpc>
               <a:buNone/>
-            </a:pPr>
-            <a:fld id="{DC266C2B-64F8-4D2F-AEF3-522F722B63C3}" type="slidenum">
+              <a:tabLst>
+                <a:tab pos="0" algn="l"/>
+              </a:tabLst>
+            </a:pPr>
+            <a:fld id="{EED853C8-AB9C-4C3D-A410-8D0C9D29AFCC}" type="slidenum">
               <a:rPr lang="en-AU" sz="1200" b="0" u="none" strike="noStrike">
                 <a:solidFill>
                   <a:schemeClr val="dk1">
@@ -3131,7 +3458,7 @@
                 <a:uFillTx/>
                 <a:latin typeface="Aptos"/>
               </a:rPr>
-              <a:t>13</a:t>
+              <a:t>&lt;number&gt;</a:t>
             </a:fld>
             <a:endParaRPr lang="en-AU" sz="1200" b="0" u="none" strike="noStrike">
               <a:solidFill>
@@ -3186,7 +3513,7 @@
         <p:spPr>
           <a:xfrm>
             <a:off x="1523880" y="1122480"/>
-            <a:ext cx="9143640" cy="2387160"/>
+            <a:ext cx="9143280" cy="2386800"/>
           </a:xfrm>
           <a:prstGeom prst="rect">
             <a:avLst/>
@@ -3206,6 +3533,9 @@
                 <a:spcPct val="90000"/>
               </a:lnSpc>
               <a:buNone/>
+              <a:tabLst>
+                <a:tab pos="0" algn="l"/>
+              </a:tabLst>
               <a:defRPr lang="en-US" sz="6000" b="0" u="none" strike="noStrike">
                 <a:solidFill>
                   <a:schemeClr val="dk1"/>
@@ -3222,6 +3552,9 @@
                 <a:spcPct val="90000"/>
               </a:lnSpc>
               <a:buNone/>
+              <a:tabLst>
+                <a:tab pos="0" algn="l"/>
+              </a:tabLst>
             </a:pPr>
             <a:r>
               <a:rPr lang="en-US" sz="6000" b="0" u="none" strike="noStrike">
@@ -3258,7 +3591,7 @@
         <p:spPr>
           <a:xfrm>
             <a:off x="838080" y="6356520"/>
-            <a:ext cx="2742840" cy="364680"/>
+            <a:ext cx="2742480" cy="364320"/>
           </a:xfrm>
           <a:prstGeom prst="rect">
             <a:avLst/>
@@ -3278,6 +3611,9 @@
                 <a:spcPct val="100000"/>
               </a:lnSpc>
               <a:buNone/>
+              <a:tabLst>
+                <a:tab pos="0" algn="l"/>
+              </a:tabLst>
               <a:defRPr lang="en-AU" sz="1200" b="0" u="none" strike="noStrike">
                 <a:solidFill>
                   <a:schemeClr val="dk1">
@@ -3296,6 +3632,9 @@
                 <a:spcPct val="100000"/>
               </a:lnSpc>
               <a:buNone/>
+              <a:tabLst>
+                <a:tab pos="0" algn="l"/>
+              </a:tabLst>
             </a:pPr>
             <a:r>
               <a:rPr lang="en-AU" sz="1200" b="0" u="none" strike="noStrike">
@@ -3308,7 +3647,7 @@
                 <a:uFillTx/>
                 <a:latin typeface="Aptos"/>
               </a:rPr>
-              <a:t> </a:t>
+              <a:t>&lt;date/time&gt;</a:t>
             </a:r>
             <a:endParaRPr lang="en-AU" sz="1200" b="0" u="none" strike="noStrike">
               <a:solidFill>
@@ -3334,7 +3673,7 @@
         <p:spPr>
           <a:xfrm>
             <a:off x="4038480" y="6356520"/>
-            <a:ext cx="4114440" cy="364680"/>
+            <a:ext cx="4114080" cy="364320"/>
           </a:xfrm>
           <a:prstGeom prst="rect">
             <a:avLst/>
@@ -3350,7 +3689,13 @@
           </a:bodyPr>
           <a:lstStyle>
             <a:lvl1pPr indent="0" algn="ctr">
-              <a:buNone/>
+              <a:lnSpc>
+                <a:spcPct val="100000"/>
+              </a:lnSpc>
+              <a:buNone/>
+              <a:tabLst>
+                <a:tab pos="0" algn="l"/>
+              </a:tabLst>
               <a:defRPr lang="en-AU" sz="1400" b="0" u="none" strike="noStrike">
                 <a:solidFill>
                   <a:srgbClr val="000000"/>
@@ -3363,7 +3708,13 @@
           </a:lstStyle>
           <a:p>
             <a:pPr indent="0" algn="ctr">
-              <a:buNone/>
+              <a:lnSpc>
+                <a:spcPct val="100000"/>
+              </a:lnSpc>
+              <a:buNone/>
+              <a:tabLst>
+                <a:tab pos="0" algn="l"/>
+              </a:tabLst>
             </a:pPr>
             <a:r>
               <a:rPr lang="en-AU" sz="1400" b="0" u="none" strike="noStrike">
@@ -3374,7 +3725,7 @@
                 <a:uFillTx/>
                 <a:latin typeface="Times New Roman"/>
               </a:rPr>
-              <a:t> </a:t>
+              <a:t>&lt;footer&gt;</a:t>
             </a:r>
             <a:endParaRPr lang="en-AU" sz="1400" b="0" u="none" strike="noStrike">
               <a:solidFill>
@@ -3400,7 +3751,7 @@
         <p:spPr>
           <a:xfrm>
             <a:off x="8610480" y="6356520"/>
-            <a:ext cx="2742840" cy="364680"/>
+            <a:ext cx="2742480" cy="364320"/>
           </a:xfrm>
           <a:prstGeom prst="rect">
             <a:avLst/>
@@ -3420,6 +3771,9 @@
                 <a:spcPct val="100000"/>
               </a:lnSpc>
               <a:buNone/>
+              <a:tabLst>
+                <a:tab pos="0" algn="l"/>
+              </a:tabLst>
               <a:defRPr lang="en-AU" sz="1200" b="0" u="none" strike="noStrike">
                 <a:solidFill>
                   <a:schemeClr val="dk1">
@@ -3438,8 +3792,11 @@
                 <a:spcPct val="100000"/>
               </a:lnSpc>
               <a:buNone/>
-            </a:pPr>
-            <a:fld id="{192F38EE-5D56-4D70-B1C3-2C6C5F634897}" type="slidenum">
+              <a:tabLst>
+                <a:tab pos="0" algn="l"/>
+              </a:tabLst>
+            </a:pPr>
+            <a:fld id="{D1E4D2D7-953C-44A4-B494-71D39A2B1E0C}" type="slidenum">
               <a:rPr lang="en-AU" sz="1200" b="0" u="none" strike="noStrike">
                 <a:solidFill>
                   <a:schemeClr val="dk1">
@@ -3450,7 +3807,7 @@
                 <a:uFillTx/>
                 <a:latin typeface="Aptos"/>
               </a:rPr>
-              <a:t>13</a:t>
+              <a:t>&lt;number&gt;</a:t>
             </a:fld>
             <a:endParaRPr lang="en-AU" sz="1200" b="0" u="none" strike="noStrike">
               <a:solidFill>
@@ -3476,7 +3833,7 @@
         <p:spPr>
           <a:xfrm>
             <a:off x="609480" y="1604520"/>
-            <a:ext cx="10972440" cy="3977280"/>
+            <a:ext cx="10972080" cy="3976920"/>
           </a:xfrm>
           <a:prstGeom prst="rect">
             <a:avLst/>
@@ -3962,7 +4319,7 @@
         <p:spPr>
           <a:xfrm>
             <a:off x="0" y="0"/>
-            <a:ext cx="12188520" cy="6857640"/>
+            <a:ext cx="12188160" cy="6857280"/>
           </a:xfrm>
           <a:prstGeom prst="rect">
             <a:avLst/>
@@ -4014,7 +4371,7 @@
         <p:spPr>
           <a:xfrm>
             <a:off x="841320" y="548640"/>
-            <a:ext cx="3118680" cy="5431320"/>
+            <a:ext cx="3118320" cy="5430960"/>
           </a:xfrm>
           <a:prstGeom prst="rect">
             <a:avLst/>
@@ -4034,6 +4391,9 @@
                 <a:spcPct val="90000"/>
               </a:lnSpc>
               <a:buNone/>
+              <a:tabLst>
+                <a:tab pos="0" algn="l"/>
+              </a:tabLst>
             </a:pPr>
             <a:r>
               <a:rPr lang="en-US" sz="5400" b="0" u="none" strike="noStrike">
@@ -4071,16 +4431,16 @@
         </p:nvSpPr>
         <p:spPr>
           <a:xfrm rot="5400000">
-            <a:off x="2544120" y="3258360"/>
-            <a:ext cx="4480200" cy="18000"/>
+            <a:off x="2544480" y="3258360"/>
+            <a:ext cx="4479840" cy="17640"/>
           </a:xfrm>
           <a:custGeom>
             <a:avLst/>
             <a:gdLst>
-              <a:gd name="textAreaLeft" fmla="*/ 0 w 4480200"/>
-              <a:gd name="textAreaRight" fmla="*/ 4480560 w 4480200"/>
-              <a:gd name="textAreaTop" fmla="*/ 0 h 18000"/>
-              <a:gd name="textAreaBottom" fmla="*/ 18360 h 18000"/>
+              <a:gd name="textAreaLeft" fmla="*/ 0 w 4479840"/>
+              <a:gd name="textAreaRight" fmla="*/ 4480560 w 4479840"/>
+              <a:gd name="textAreaTop" fmla="*/ 0 h 17640"/>
+              <a:gd name="textAreaBottom" fmla="*/ 18360 h 17640"/>
               <a:gd name="GluePoint1X" fmla="*/ 0 w 4480560"/>
               <a:gd name="GluePoint1Y" fmla="*/ 0 h 18288"/>
               <a:gd name="GluePoint2X" fmla="*/ 595274 w 4480560"/>
@@ -4399,7 +4759,7 @@
         <p:spPr>
           <a:xfrm>
             <a:off x="4793400" y="337320"/>
-            <a:ext cx="7125480" cy="6280560"/>
+            <a:ext cx="7125120" cy="6280200"/>
           </a:xfrm>
           <a:prstGeom prst="rect">
             <a:avLst/>
@@ -4414,7 +4774,7 @@
             <a:noAutofit/>
           </a:bodyPr>
           <a:p>
-            <a:pPr indent="-228600" algn="l" defTabSz="914400">
+            <a:pPr marL="216000" indent="-228600" algn="l" defTabSz="914400">
               <a:lnSpc>
                 <a:spcPct val="90000"/>
               </a:lnSpc>
@@ -4443,11 +4803,11 @@
             </a:r>
             <a:endParaRPr lang="en-AU" sz="2800" b="0" u="none" strike="noStrike">
               <a:solidFill>
-                <a:schemeClr val="dk1"/>
-              </a:solidFill>
-              <a:effectLst/>
-              <a:uFillTx/>
-              <a:latin typeface="Aptos"/>
+                <a:srgbClr val="000000"/>
+              </a:solidFill>
+              <a:effectLst/>
+              <a:uFillTx/>
+              <a:latin typeface="Arial"/>
             </a:endParaRPr>
           </a:p>
           <a:p>
@@ -4461,6 +4821,7 @@
               <a:buClr>
                 <a:srgbClr val="4EA72E"/>
               </a:buClr>
+              <a:buSzPct val="75000"/>
               <a:buFont typeface="Aptos Display"/>
               <a:buAutoNum type="arabicPeriod"/>
               <a:tabLst>
@@ -4491,11 +4852,11 @@
             </a:r>
             <a:endParaRPr lang="en-AU" sz="2800" b="0" u="none" strike="noStrike">
               <a:solidFill>
-                <a:schemeClr val="dk1"/>
-              </a:solidFill>
-              <a:effectLst/>
-              <a:uFillTx/>
-              <a:latin typeface="Aptos"/>
+                <a:srgbClr val="000000"/>
+              </a:solidFill>
+              <a:effectLst/>
+              <a:uFillTx/>
+              <a:latin typeface="Arial"/>
             </a:endParaRPr>
           </a:p>
           <a:p>
@@ -4509,6 +4870,7 @@
               <a:buClr>
                 <a:srgbClr val="4EA72E"/>
               </a:buClr>
+              <a:buSzPct val="75000"/>
               <a:buFont typeface="Aptos Display"/>
               <a:buAutoNum type="arabicPeriod"/>
               <a:tabLst>
@@ -4539,11 +4901,11 @@
             </a:r>
             <a:endParaRPr lang="en-AU" sz="2800" b="0" u="none" strike="noStrike">
               <a:solidFill>
-                <a:schemeClr val="dk1"/>
-              </a:solidFill>
-              <a:effectLst/>
-              <a:uFillTx/>
-              <a:latin typeface="Aptos"/>
+                <a:srgbClr val="000000"/>
+              </a:solidFill>
+              <a:effectLst/>
+              <a:uFillTx/>
+              <a:latin typeface="Arial"/>
             </a:endParaRPr>
           </a:p>
           <a:p>
@@ -4557,6 +4919,7 @@
               <a:buClr>
                 <a:srgbClr val="4EA72E"/>
               </a:buClr>
+              <a:buSzPct val="75000"/>
               <a:buFont typeface="Aptos Display"/>
               <a:buAutoNum type="arabicPeriod"/>
               <a:tabLst>
@@ -4587,11 +4950,11 @@
             </a:r>
             <a:endParaRPr lang="en-AU" sz="2800" b="0" u="none" strike="noStrike">
               <a:solidFill>
-                <a:schemeClr val="dk1"/>
-              </a:solidFill>
-              <a:effectLst/>
-              <a:uFillTx/>
-              <a:latin typeface="Aptos"/>
+                <a:srgbClr val="000000"/>
+              </a:solidFill>
+              <a:effectLst/>
+              <a:uFillTx/>
+              <a:latin typeface="Arial"/>
             </a:endParaRPr>
           </a:p>
           <a:p>
@@ -4605,6 +4968,7 @@
               <a:buClr>
                 <a:srgbClr val="4EA72E"/>
               </a:buClr>
+              <a:buSzPct val="75000"/>
               <a:buFont typeface="Aptos Display"/>
               <a:buAutoNum type="arabicPeriod"/>
               <a:tabLst>
@@ -4635,11 +4999,11 @@
             </a:r>
             <a:endParaRPr lang="en-AU" sz="2800" b="0" u="none" strike="noStrike">
               <a:solidFill>
-                <a:schemeClr val="dk1"/>
-              </a:solidFill>
-              <a:effectLst/>
-              <a:uFillTx/>
-              <a:latin typeface="Aptos"/>
+                <a:srgbClr val="000000"/>
+              </a:solidFill>
+              <a:effectLst/>
+              <a:uFillTx/>
+              <a:latin typeface="Arial"/>
             </a:endParaRPr>
           </a:p>
         </p:txBody>
@@ -4687,7 +5051,7 @@
         <p:spPr>
           <a:xfrm>
             <a:off x="0" y="0"/>
-            <a:ext cx="4103640" cy="6857640"/>
+            <a:ext cx="4103280" cy="6857280"/>
           </a:xfrm>
           <a:prstGeom prst="rect">
             <a:avLst/>
@@ -4709,6 +5073,9 @@
                 <a:spcPct val="90000"/>
               </a:lnSpc>
               <a:buNone/>
+              <a:tabLst>
+                <a:tab pos="0" algn="l"/>
+              </a:tabLst>
             </a:pPr>
             <a:r>
               <a:rPr lang="en-US" sz="4400" b="1" u="none" strike="noStrike">
@@ -4759,7 +5126,7 @@
         <p:spPr>
           <a:xfrm>
             <a:off x="4439880" y="287280"/>
-            <a:ext cx="7623000" cy="6015600"/>
+            <a:ext cx="7622640" cy="6015240"/>
           </a:xfrm>
           <a:prstGeom prst="rect">
             <a:avLst/>
@@ -5713,7 +6080,7 @@
         <p:spPr>
           <a:xfrm>
             <a:off x="0" y="0"/>
-            <a:ext cx="4103640" cy="2292840"/>
+            <a:ext cx="4103280" cy="2292480"/>
           </a:xfrm>
           <a:prstGeom prst="rect">
             <a:avLst/>
@@ -5735,6 +6102,9 @@
                 <a:spcPct val="90000"/>
               </a:lnSpc>
               <a:buNone/>
+              <a:tabLst>
+                <a:tab pos="0" algn="l"/>
+              </a:tabLst>
             </a:pPr>
             <a:r>
               <a:rPr lang="en-US" sz="4400" b="1" u="none" strike="noStrike">
@@ -5785,7 +6155,7 @@
         <p:spPr>
           <a:xfrm>
             <a:off x="4439880" y="287280"/>
-            <a:ext cx="7539120" cy="6238800"/>
+            <a:ext cx="7538760" cy="6238440"/>
           </a:xfrm>
           <a:prstGeom prst="rect">
             <a:avLst/>
@@ -6700,7 +7070,7 @@
         <p:spPr>
           <a:xfrm>
             <a:off x="85680" y="2521440"/>
-            <a:ext cx="4023000" cy="3883320"/>
+            <a:ext cx="4022640" cy="3882960"/>
           </a:xfrm>
           <a:prstGeom prst="rect">
             <a:avLst/>
@@ -6754,7 +7124,7 @@
         <p:spPr>
           <a:xfrm>
             <a:off x="0" y="0"/>
-            <a:ext cx="4103640" cy="2264040"/>
+            <a:ext cx="4103280" cy="2263680"/>
           </a:xfrm>
           <a:prstGeom prst="rect">
             <a:avLst/>
@@ -6776,6 +7146,9 @@
                 <a:spcPct val="90000"/>
               </a:lnSpc>
               <a:buNone/>
+              <a:tabLst>
+                <a:tab pos="0" algn="l"/>
+              </a:tabLst>
             </a:pPr>
             <a:r>
               <a:rPr lang="en-US" sz="4400" b="1" u="none" strike="noStrike">
@@ -6826,7 +7199,7 @@
         <p:spPr>
           <a:xfrm>
             <a:off x="4325760" y="201240"/>
-            <a:ext cx="7594200" cy="6472800"/>
+            <a:ext cx="7593840" cy="6472440"/>
           </a:xfrm>
           <a:prstGeom prst="rect">
             <a:avLst/>
@@ -7351,6 +7724,9 @@
                 <a:spcPts val="1001"/>
               </a:spcBef>
               <a:buNone/>
+              <a:tabLst>
+                <a:tab pos="0" algn="l"/>
+              </a:tabLst>
             </a:pPr>
             <a:endParaRPr lang="en-US" sz="2400" b="0" u="none" strike="noStrike">
               <a:solidFill>
@@ -7370,6 +7746,9 @@
                 <a:spcPts val="1001"/>
               </a:spcBef>
               <a:buNone/>
+              <a:tabLst>
+                <a:tab pos="0" algn="l"/>
+              </a:tabLst>
             </a:pPr>
             <a:endParaRPr lang="en-US" sz="2400" b="0" u="none" strike="noStrike">
               <a:solidFill>
@@ -7418,7 +7797,7 @@
         <p:spPr>
           <a:xfrm>
             <a:off x="85680" y="2419920"/>
-            <a:ext cx="4023000" cy="4042800"/>
+            <a:ext cx="4022640" cy="4042440"/>
           </a:xfrm>
           <a:prstGeom prst="rect">
             <a:avLst/>
@@ -7472,7 +7851,7 @@
         <p:spPr>
           <a:xfrm>
             <a:off x="0" y="0"/>
-            <a:ext cx="4103640" cy="6857640"/>
+            <a:ext cx="4103280" cy="6857280"/>
           </a:xfrm>
           <a:prstGeom prst="rect">
             <a:avLst/>
@@ -7494,6 +7873,9 @@
                 <a:spcPct val="90000"/>
               </a:lnSpc>
               <a:buNone/>
+              <a:tabLst>
+                <a:tab pos="0" algn="l"/>
+              </a:tabLst>
             </a:pPr>
             <a:r>
               <a:rPr lang="en-US" sz="4400" b="1" u="none" strike="noStrike">
@@ -7530,7 +7912,7 @@
         <p:spPr>
           <a:xfrm>
             <a:off x="4325760" y="201240"/>
-            <a:ext cx="7594200" cy="6472800"/>
+            <a:ext cx="7593840" cy="6472440"/>
           </a:xfrm>
           <a:prstGeom prst="rect">
             <a:avLst/>
@@ -7944,6 +8326,382 @@
                 <a:ea typeface="Arial"/>
               </a:rPr>
               <a:t>Refer to BGP lab manual for other sections of this slide deck.</a:t>
+            </a:r>
+            <a:endParaRPr lang="en-US" sz="2400" b="0" u="none" strike="noStrike">
+              <a:solidFill>
+                <a:schemeClr val="dk1"/>
+              </a:solidFill>
+              <a:effectLst/>
+              <a:uFillTx/>
+              <a:latin typeface="Aptos"/>
+            </a:endParaRPr>
+          </a:p>
+          <a:p>
+            <a:pPr indent="0" algn="l" defTabSz="914400">
+              <a:lnSpc>
+                <a:spcPct val="90000"/>
+              </a:lnSpc>
+              <a:spcBef>
+                <a:spcPts val="1001"/>
+              </a:spcBef>
+              <a:buNone/>
+              <a:tabLst>
+                <a:tab pos="0" algn="l"/>
+              </a:tabLst>
+            </a:pPr>
+            <a:endParaRPr lang="en-US" sz="2400" b="0" u="none" strike="noStrike">
+              <a:solidFill>
+                <a:schemeClr val="dk1"/>
+              </a:solidFill>
+              <a:effectLst/>
+              <a:uFillTx/>
+              <a:latin typeface="Aptos"/>
+            </a:endParaRPr>
+          </a:p>
+          <a:p>
+            <a:pPr indent="0" algn="l" defTabSz="914400">
+              <a:lnSpc>
+                <a:spcPct val="90000"/>
+              </a:lnSpc>
+              <a:spcBef>
+                <a:spcPts val="1001"/>
+              </a:spcBef>
+              <a:buNone/>
+              <a:tabLst>
+                <a:tab pos="0" algn="l"/>
+              </a:tabLst>
+            </a:pPr>
+            <a:endParaRPr lang="en-US" sz="2400" b="0" u="none" strike="noStrike">
+              <a:solidFill>
+                <a:schemeClr val="dk1"/>
+              </a:solidFill>
+              <a:effectLst/>
+              <a:uFillTx/>
+              <a:latin typeface="Aptos"/>
+            </a:endParaRPr>
+          </a:p>
+          <a:p>
+            <a:pPr indent="0" algn="l" defTabSz="914400">
+              <a:lnSpc>
+                <a:spcPct val="90000"/>
+              </a:lnSpc>
+              <a:spcBef>
+                <a:spcPts val="1001"/>
+              </a:spcBef>
+              <a:buNone/>
+              <a:tabLst>
+                <a:tab pos="0" algn="l"/>
+              </a:tabLst>
+            </a:pPr>
+            <a:endParaRPr lang="en-US" sz="2400" b="0" u="none" strike="noStrike">
+              <a:solidFill>
+                <a:schemeClr val="dk1"/>
+              </a:solidFill>
+              <a:effectLst/>
+              <a:uFillTx/>
+              <a:latin typeface="Aptos"/>
+            </a:endParaRPr>
+          </a:p>
+          <a:p>
+            <a:pPr indent="0" algn="l" defTabSz="914400">
+              <a:lnSpc>
+                <a:spcPct val="90000"/>
+              </a:lnSpc>
+              <a:spcBef>
+                <a:spcPts val="1001"/>
+              </a:spcBef>
+              <a:buNone/>
+              <a:tabLst>
+                <a:tab pos="0" algn="l"/>
+              </a:tabLst>
+            </a:pPr>
+            <a:endParaRPr lang="en-US" sz="2400" b="0" u="none" strike="noStrike">
+              <a:solidFill>
+                <a:schemeClr val="dk1"/>
+              </a:solidFill>
+              <a:effectLst/>
+              <a:uFillTx/>
+              <a:latin typeface="Aptos"/>
+            </a:endParaRPr>
+          </a:p>
+          <a:p>
+            <a:pPr indent="0" algn="l" defTabSz="914400">
+              <a:lnSpc>
+                <a:spcPct val="90000"/>
+              </a:lnSpc>
+              <a:spcBef>
+                <a:spcPts val="1001"/>
+              </a:spcBef>
+              <a:buNone/>
+              <a:tabLst>
+                <a:tab pos="0" algn="l"/>
+              </a:tabLst>
+            </a:pPr>
+            <a:endParaRPr lang="en-US" sz="2400" b="0" u="none" strike="noStrike">
+              <a:solidFill>
+                <a:schemeClr val="dk1"/>
+              </a:solidFill>
+              <a:effectLst/>
+              <a:uFillTx/>
+              <a:latin typeface="Aptos"/>
+            </a:endParaRPr>
+          </a:p>
+          <a:p>
+            <a:pPr indent="0" algn="l" defTabSz="914400">
+              <a:lnSpc>
+                <a:spcPct val="90000"/>
+              </a:lnSpc>
+              <a:spcBef>
+                <a:spcPts val="1001"/>
+              </a:spcBef>
+              <a:buNone/>
+              <a:tabLst>
+                <a:tab pos="0" algn="l"/>
+              </a:tabLst>
+            </a:pPr>
+            <a:endParaRPr lang="en-US" sz="2400" b="0" u="none" strike="noStrike">
+              <a:solidFill>
+                <a:schemeClr val="dk1"/>
+              </a:solidFill>
+              <a:effectLst/>
+              <a:uFillTx/>
+              <a:latin typeface="Aptos"/>
+            </a:endParaRPr>
+          </a:p>
+        </p:txBody>
+      </p:sp>
+    </p:spTree>
+  </p:cSld>
+  <mc:AlternateContent>
+    <mc:Choice Requires="p14">
+      <p:transition spd="slow" p14:dur="2000"/>
+    </mc:Choice>
+    <mc:Fallback>
+      <p:transition spd="slow"/>
+    </mc:Fallback>
+  </mc:AlternateContent>
+</p:sld>
+</file>
+
+<file path=ppt/slides/slide14.xml><?xml version="1.0" encoding="utf-8"?>
+<p:sld xmlns:a="http://schemas.openxmlformats.org/drawingml/2006/main" xmlns:p="http://schemas.openxmlformats.org/presentationml/2006/main" xmlns:r="http://schemas.openxmlformats.org/officeDocument/2006/relationships" xmlns:p14="http://schemas.microsoft.com/office/powerpoint/2010/main" xmlns:p15="http://schemas.microsoft.com/office/powerpoint/2012/main" xmlns:mc="http://schemas.openxmlformats.org/markup-compatibility/2006">
+  <p:cSld>
+    <p:spTree>
+      <p:nvGrpSpPr>
+        <p:cNvPr id="1" name=""/>
+        <p:cNvGrpSpPr/>
+        <p:nvPr/>
+      </p:nvGrpSpPr>
+      <p:grpSpPr>
+        <a:xfrm>
+          <a:off x="0" y="0"/>
+          <a:ext cx="0" cy="0"/>
+          <a:chOff x="0" y="0"/>
+          <a:chExt cx="0" cy="0"/>
+        </a:xfrm>
+      </p:grpSpPr>
+      <p:sp>
+        <p:nvSpPr>
+          <p:cNvPr id="50" name="PlaceHolder 1"/>
+          <p:cNvSpPr>
+            <a:spLocks noGrp="1"/>
+          </p:cNvSpPr>
+          <p:nvPr>
+            <p:ph type="title"/>
+          </p:nvPr>
+        </p:nvSpPr>
+        <p:spPr>
+          <a:xfrm>
+            <a:off x="0" y="0"/>
+            <a:ext cx="4103280" cy="6857280"/>
+          </a:xfrm>
+          <a:prstGeom prst="rect">
+            <a:avLst/>
+          </a:prstGeom>
+          <a:solidFill>
+            <a:schemeClr val="accent2"/>
+          </a:solidFill>
+          <a:ln w="0">
+            <a:noFill/>
+          </a:ln>
+        </p:spPr>
+        <p:txBody>
+          <a:bodyPr lIns="91440" tIns="45720" rIns="91440" bIns="45720" anchor="ctr">
+            <a:normAutofit/>
+          </a:bodyPr>
+          <a:p>
+            <a:pPr indent="0" algn="ctr" defTabSz="914400">
+              <a:lnSpc>
+                <a:spcPct val="90000"/>
+              </a:lnSpc>
+              <a:buNone/>
+              <a:tabLst>
+                <a:tab pos="0" algn="l"/>
+              </a:tabLst>
+            </a:pPr>
+            <a:r>
+              <a:rPr lang="en-US" sz="4400" b="1" u="none" strike="noStrike">
+                <a:solidFill>
+                  <a:schemeClr val="lt1"/>
+                </a:solidFill>
+                <a:effectLst/>
+                <a:uFillTx/>
+                <a:latin typeface="Aptos Display"/>
+              </a:rPr>
+              <a:t>1. BGP  Communities </a:t>
+            </a:r>
+            <a:endParaRPr lang="en-US" sz="4400" b="0" u="none" strike="noStrike">
+              <a:solidFill>
+                <a:schemeClr val="dk1"/>
+              </a:solidFill>
+              <a:effectLst/>
+              <a:uFillTx/>
+              <a:latin typeface="Aptos Display"/>
+            </a:endParaRPr>
+          </a:p>
+        </p:txBody>
+      </p:sp>
+      <p:sp>
+        <p:nvSpPr>
+          <p:cNvPr id="51" name="PlaceHolder 2"/>
+          <p:cNvSpPr>
+            <a:spLocks noGrp="1"/>
+          </p:cNvSpPr>
+          <p:nvPr>
+            <p:ph/>
+          </p:nvPr>
+        </p:nvSpPr>
+        <p:spPr>
+          <a:xfrm>
+            <a:off x="4325760" y="201240"/>
+            <a:ext cx="7593840" cy="6472440"/>
+          </a:xfrm>
+          <a:prstGeom prst="rect">
+            <a:avLst/>
+          </a:prstGeom>
+          <a:noFill/>
+          <a:ln w="0">
+            <a:noFill/>
+          </a:ln>
+        </p:spPr>
+        <p:txBody>
+          <a:bodyPr lIns="91440" tIns="45720" rIns="91440" bIns="45720" anchor="t">
+            <a:normAutofit/>
+          </a:bodyPr>
+          <a:p>
+            <a:pPr indent="0" algn="l" defTabSz="914400">
+              <a:lnSpc>
+                <a:spcPct val="90000"/>
+              </a:lnSpc>
+              <a:spcBef>
+                <a:spcPts val="1001"/>
+              </a:spcBef>
+              <a:buNone/>
+              <a:tabLst>
+                <a:tab pos="0" algn="l"/>
+              </a:tabLst>
+            </a:pPr>
+            <a:r>
+              <a:rPr lang="en-US" sz="2400" b="1" u="none" strike="noStrike">
+                <a:solidFill>
+                  <a:schemeClr val="dk1"/>
+                </a:solidFill>
+                <a:effectLst/>
+                <a:uFillTx/>
+                <a:latin typeface="Aptos"/>
+                <a:ea typeface="Arial"/>
+              </a:rPr>
+              <a:t>Steps:</a:t>
+            </a:r>
+            <a:endParaRPr lang="en-US" sz="2400" b="0" u="none" strike="noStrike">
+              <a:solidFill>
+                <a:schemeClr val="dk1"/>
+              </a:solidFill>
+              <a:effectLst/>
+              <a:uFillTx/>
+              <a:latin typeface="Aptos"/>
+            </a:endParaRPr>
+          </a:p>
+          <a:p>
+            <a:pPr indent="0" algn="l" defTabSz="914400">
+              <a:lnSpc>
+                <a:spcPct val="90000"/>
+              </a:lnSpc>
+              <a:spcBef>
+                <a:spcPts val="1001"/>
+              </a:spcBef>
+              <a:buNone/>
+              <a:tabLst>
+                <a:tab pos="0" algn="l"/>
+              </a:tabLst>
+            </a:pPr>
+            <a:r>
+              <a:rPr lang="en-US" sz="2400" b="1" u="none" strike="noStrike">
+                <a:solidFill>
+                  <a:schemeClr val="dk1"/>
+                </a:solidFill>
+                <a:effectLst/>
+                <a:uFillTx/>
+                <a:latin typeface="Aptos"/>
+                <a:ea typeface="Arial"/>
+              </a:rPr>
+              <a:t>Set community/Mark routes with private community</a:t>
+            </a:r>
+            <a:endParaRPr lang="en-US" sz="2400" b="0" u="none" strike="noStrike">
+              <a:solidFill>
+                <a:schemeClr val="dk1"/>
+              </a:solidFill>
+              <a:effectLst/>
+              <a:uFillTx/>
+              <a:latin typeface="Aptos"/>
+            </a:endParaRPr>
+          </a:p>
+          <a:p>
+            <a:pPr indent="0" algn="l" defTabSz="914400">
+              <a:lnSpc>
+                <a:spcPct val="90000"/>
+              </a:lnSpc>
+              <a:spcBef>
+                <a:spcPts val="1001"/>
+              </a:spcBef>
+              <a:buNone/>
+              <a:tabLst>
+                <a:tab pos="0" algn="l"/>
+              </a:tabLst>
+            </a:pPr>
+            <a:endParaRPr lang="en-US" sz="2400" b="0" u="none" strike="noStrike">
+              <a:solidFill>
+                <a:schemeClr val="dk1"/>
+              </a:solidFill>
+              <a:effectLst/>
+              <a:uFillTx/>
+              <a:latin typeface="Aptos"/>
+            </a:endParaRPr>
+          </a:p>
+          <a:p>
+            <a:pPr indent="0" algn="l" defTabSz="914400">
+              <a:lnSpc>
+                <a:spcPct val="90000"/>
+              </a:lnSpc>
+              <a:spcBef>
+                <a:spcPts val="1001"/>
+              </a:spcBef>
+              <a:buNone/>
+              <a:tabLst>
+                <a:tab pos="0" algn="l"/>
+              </a:tabLst>
+            </a:pPr>
+            <a:r>
+              <a:rPr lang="en-US" sz="2400" b="1" u="none" strike="noStrike">
+                <a:solidFill>
+                  <a:schemeClr val="dk1"/>
+                </a:solidFill>
+                <a:effectLst/>
+                <a:uFillTx/>
+                <a:latin typeface="Aptos"/>
+                <a:ea typeface="Arial"/>
+              </a:rPr>
+              <a:t>Conditionally match community</a:t>
             </a:r>
             <a:endParaRPr lang="en-US" sz="2400" b="0" u="none" strike="noStrike">
               <a:solidFill>
@@ -8131,7 +8889,7 @@
         <p:spPr>
           <a:xfrm>
             <a:off x="0" y="0"/>
-            <a:ext cx="4103640" cy="6857640"/>
+            <a:ext cx="4103280" cy="6857280"/>
           </a:xfrm>
           <a:prstGeom prst="rect">
             <a:avLst/>
@@ -8153,6 +8911,9 @@
                 <a:spcPct val="90000"/>
               </a:lnSpc>
               <a:buNone/>
+              <a:tabLst>
+                <a:tab pos="0" algn="l"/>
+              </a:tabLst>
             </a:pPr>
             <a:r>
               <a:rPr lang="en-US" sz="4400" b="1" u="none" strike="noStrike">
@@ -8189,7 +8950,7 @@
         <p:spPr>
           <a:xfrm>
             <a:off x="4964040" y="544320"/>
-            <a:ext cx="6389640" cy="5779800"/>
+            <a:ext cx="6389280" cy="5779440"/>
           </a:xfrm>
           <a:prstGeom prst="rect">
             <a:avLst/>
@@ -8603,7 +9364,7 @@
         <p:spPr>
           <a:xfrm>
             <a:off x="0" y="0"/>
-            <a:ext cx="4103640" cy="6857640"/>
+            <a:ext cx="4103280" cy="6857280"/>
           </a:xfrm>
           <a:prstGeom prst="rect">
             <a:avLst/>
@@ -8625,6 +9386,9 @@
                 <a:spcPct val="90000"/>
               </a:lnSpc>
               <a:buNone/>
+              <a:tabLst>
+                <a:tab pos="0" algn="l"/>
+              </a:tabLst>
             </a:pPr>
             <a:r>
               <a:rPr lang="en-US" sz="4400" b="1" u="none" strike="noStrike">
@@ -8675,7 +9439,7 @@
         <p:spPr>
           <a:xfrm>
             <a:off x="4964040" y="544320"/>
-            <a:ext cx="6389640" cy="5779800"/>
+            <a:ext cx="6389280" cy="5779440"/>
           </a:xfrm>
           <a:prstGeom prst="rect">
             <a:avLst/>
@@ -9095,6 +9859,9 @@
                 <a:spcPts val="499"/>
               </a:spcBef>
               <a:buNone/>
+              <a:tabLst>
+                <a:tab pos="0" algn="l"/>
+              </a:tabLst>
             </a:pPr>
             <a:endParaRPr lang="en-US" sz="2000" b="0" u="none" strike="noStrike">
               <a:solidFill>
@@ -9114,6 +9881,9 @@
                 <a:spcPts val="1001"/>
               </a:spcBef>
               <a:buNone/>
+              <a:tabLst>
+                <a:tab pos="0" algn="l"/>
+              </a:tabLst>
             </a:pPr>
             <a:endParaRPr lang="en-US" sz="2800" b="0" u="none" strike="noStrike">
               <a:solidFill>
@@ -9133,6 +9903,9 @@
                 <a:spcPts val="1001"/>
               </a:spcBef>
               <a:buNone/>
+              <a:tabLst>
+                <a:tab pos="0" algn="l"/>
+              </a:tabLst>
             </a:pPr>
             <a:endParaRPr lang="en-US" sz="2800" b="0" u="none" strike="noStrike">
               <a:solidFill>
@@ -9152,6 +9925,9 @@
                 <a:spcPts val="1001"/>
               </a:spcBef>
               <a:buNone/>
+              <a:tabLst>
+                <a:tab pos="0" algn="l"/>
+              </a:tabLst>
             </a:pPr>
             <a:endParaRPr lang="en-US" sz="2800" b="0" u="none" strike="noStrike">
               <a:solidFill>
@@ -9207,7 +9983,7 @@
         <p:spPr>
           <a:xfrm>
             <a:off x="0" y="0"/>
-            <a:ext cx="4103640" cy="6857640"/>
+            <a:ext cx="4103280" cy="6857280"/>
           </a:xfrm>
           <a:prstGeom prst="rect">
             <a:avLst/>
@@ -9229,6 +10005,9 @@
                 <a:spcPct val="90000"/>
               </a:lnSpc>
               <a:buNone/>
+              <a:tabLst>
+                <a:tab pos="0" algn="l"/>
+              </a:tabLst>
             </a:pPr>
             <a:r>
               <a:rPr lang="en-US" sz="4400" b="1" u="none" strike="noStrike">
@@ -9279,7 +10058,7 @@
         <p:spPr>
           <a:xfrm>
             <a:off x="4750200" y="720720"/>
-            <a:ext cx="6482520" cy="5649840"/>
+            <a:ext cx="6482160" cy="5649480"/>
           </a:xfrm>
           <a:prstGeom prst="rect">
             <a:avLst/>
@@ -9776,7 +10555,7 @@
         <p:spPr>
           <a:xfrm>
             <a:off x="0" y="0"/>
-            <a:ext cx="4103640" cy="6857640"/>
+            <a:ext cx="4103280" cy="6857280"/>
           </a:xfrm>
           <a:prstGeom prst="rect">
             <a:avLst/>
@@ -9798,6 +10577,9 @@
                 <a:spcPct val="90000"/>
               </a:lnSpc>
               <a:buNone/>
+              <a:tabLst>
+                <a:tab pos="0" algn="l"/>
+              </a:tabLst>
             </a:pPr>
             <a:r>
               <a:rPr lang="en-US" sz="4400" b="1" u="none" strike="noStrike">
@@ -9848,7 +10630,7 @@
         <p:spPr>
           <a:xfrm>
             <a:off x="4527000" y="358560"/>
-            <a:ext cx="7160760" cy="3614760"/>
+            <a:ext cx="7160400" cy="3614400"/>
           </a:xfrm>
           <a:prstGeom prst="rect">
             <a:avLst/>
@@ -10007,6 +10789,9 @@
                 <a:spcPts val="1001"/>
               </a:spcBef>
               <a:buNone/>
+              <a:tabLst>
+                <a:tab pos="0" algn="l"/>
+              </a:tabLst>
             </a:pPr>
             <a:endParaRPr lang="en-US" sz="2400" b="0" u="none" strike="noStrike">
               <a:solidFill>
@@ -10026,6 +10811,9 @@
                 <a:spcPts val="1001"/>
               </a:spcBef>
               <a:buNone/>
+              <a:tabLst>
+                <a:tab pos="0" algn="l"/>
+              </a:tabLst>
             </a:pPr>
             <a:endParaRPr lang="en-US" sz="2800" b="0" u="none" strike="noStrike">
               <a:solidFill>
@@ -10045,6 +10833,9 @@
                 <a:spcPts val="499"/>
               </a:spcBef>
               <a:buNone/>
+              <a:tabLst>
+                <a:tab pos="0" algn="l"/>
+              </a:tabLst>
             </a:pPr>
             <a:endParaRPr lang="en-US" sz="2400" b="0" u="none" strike="noStrike">
               <a:solidFill>
@@ -10202,7 +10993,7 @@
         <p:spPr>
           <a:xfrm>
             <a:off x="4526640" y="3967200"/>
-            <a:ext cx="6648480" cy="2812680"/>
+            <a:ext cx="6648120" cy="2812320"/>
           </a:xfrm>
           <a:prstGeom prst="rect">
             <a:avLst/>
@@ -10256,7 +11047,7 @@
         <p:spPr>
           <a:xfrm>
             <a:off x="0" y="0"/>
-            <a:ext cx="4103640" cy="6857640"/>
+            <a:ext cx="4103280" cy="6857280"/>
           </a:xfrm>
           <a:prstGeom prst="rect">
             <a:avLst/>
@@ -10278,6 +11069,9 @@
                 <a:spcPct val="90000"/>
               </a:lnSpc>
               <a:buNone/>
+              <a:tabLst>
+                <a:tab pos="0" algn="l"/>
+              </a:tabLst>
             </a:pPr>
             <a:r>
               <a:rPr lang="en-US" sz="4400" b="1" u="none" strike="noStrike">
@@ -10328,7 +11122,7 @@
         <p:spPr>
           <a:xfrm>
             <a:off x="4964040" y="544320"/>
-            <a:ext cx="6389640" cy="5779800"/>
+            <a:ext cx="6389280" cy="5779440"/>
           </a:xfrm>
           <a:prstGeom prst="rect">
             <a:avLst/>
@@ -10555,6 +11349,9 @@
                 <a:spcPts val="1001"/>
               </a:spcBef>
               <a:buNone/>
+              <a:tabLst>
+                <a:tab pos="0" algn="l"/>
+              </a:tabLst>
             </a:pPr>
             <a:endParaRPr lang="en-US" sz="2800" b="0" u="none" strike="noStrike">
               <a:solidFill>
@@ -10574,6 +11371,9 @@
                 <a:spcPts val="499"/>
               </a:spcBef>
               <a:buNone/>
+              <a:tabLst>
+                <a:tab pos="0" algn="l"/>
+              </a:tabLst>
             </a:pPr>
             <a:endParaRPr lang="en-US" sz="2400" b="0" u="none" strike="noStrike">
               <a:solidFill>
@@ -10761,7 +11561,7 @@
         <p:spPr>
           <a:xfrm>
             <a:off x="0" y="0"/>
-            <a:ext cx="4103640" cy="6857640"/>
+            <a:ext cx="4103280" cy="6857280"/>
           </a:xfrm>
           <a:prstGeom prst="rect">
             <a:avLst/>
@@ -10783,6 +11583,9 @@
                 <a:spcPct val="90000"/>
               </a:lnSpc>
               <a:buNone/>
+              <a:tabLst>
+                <a:tab pos="0" algn="l"/>
+              </a:tabLst>
             </a:pPr>
             <a:r>
               <a:rPr lang="en-US" sz="4400" b="1" u="none" strike="noStrike">
@@ -10833,7 +11636,7 @@
         <p:spPr>
           <a:xfrm>
             <a:off x="4430520" y="201240"/>
-            <a:ext cx="7418160" cy="4255560"/>
+            <a:ext cx="7417800" cy="4255200"/>
           </a:xfrm>
           <a:prstGeom prst="rect">
             <a:avLst/>
@@ -11060,6 +11863,9 @@
                 <a:spcPts val="1001"/>
               </a:spcBef>
               <a:buNone/>
+              <a:tabLst>
+                <a:tab pos="0" algn="l"/>
+              </a:tabLst>
             </a:pPr>
             <a:endParaRPr lang="en-US" sz="2800" b="0" u="none" strike="noStrike">
               <a:solidFill>
@@ -11079,6 +11885,9 @@
                 <a:spcPts val="1001"/>
               </a:spcBef>
               <a:buNone/>
+              <a:tabLst>
+                <a:tab pos="0" algn="l"/>
+              </a:tabLst>
             </a:pPr>
             <a:endParaRPr lang="en-US" sz="2800" b="0" u="none" strike="noStrike">
               <a:solidFill>
@@ -11098,6 +11907,9 @@
                 <a:spcPts val="1001"/>
               </a:spcBef>
               <a:buNone/>
+              <a:tabLst>
+                <a:tab pos="0" algn="l"/>
+              </a:tabLst>
             </a:pPr>
             <a:endParaRPr lang="en-US" sz="2800" b="0" u="none" strike="noStrike">
               <a:solidFill>
@@ -11321,7 +12133,7 @@
         <p:spPr>
           <a:xfrm>
             <a:off x="4967640" y="4721760"/>
-            <a:ext cx="6598440" cy="1838520"/>
+            <a:ext cx="6598080" cy="1838160"/>
           </a:xfrm>
           <a:prstGeom prst="rect">
             <a:avLst/>
@@ -11375,7 +12187,7 @@
         <p:spPr>
           <a:xfrm>
             <a:off x="0" y="0"/>
-            <a:ext cx="4103640" cy="6857640"/>
+            <a:ext cx="4103280" cy="6857280"/>
           </a:xfrm>
           <a:prstGeom prst="rect">
             <a:avLst/>
@@ -11397,6 +12209,9 @@
                 <a:spcPct val="90000"/>
               </a:lnSpc>
               <a:buNone/>
+              <a:tabLst>
+                <a:tab pos="0" algn="l"/>
+              </a:tabLst>
             </a:pPr>
             <a:r>
               <a:rPr lang="en-US" sz="4400" b="1" u="none" strike="noStrike">
@@ -11447,7 +12262,7 @@
         <p:spPr>
           <a:xfrm>
             <a:off x="4344840" y="201240"/>
-            <a:ext cx="7580160" cy="6389640"/>
+            <a:ext cx="7579800" cy="6389280"/>
           </a:xfrm>
           <a:prstGeom prst="rect">
             <a:avLst/>
@@ -12062,7 +12877,7 @@
         <p:spPr>
           <a:xfrm>
             <a:off x="0" y="0"/>
-            <a:ext cx="4103640" cy="6857640"/>
+            <a:ext cx="4103280" cy="6857280"/>
           </a:xfrm>
           <a:prstGeom prst="rect">
             <a:avLst/>
@@ -12084,6 +12899,9 @@
                 <a:spcPct val="90000"/>
               </a:lnSpc>
               <a:buNone/>
+              <a:tabLst>
+                <a:tab pos="0" algn="l"/>
+              </a:tabLst>
             </a:pPr>
             <a:r>
               <a:rPr lang="en-US" sz="4400" b="1" u="none" strike="noStrike">
@@ -12134,7 +12952,7 @@
         <p:spPr>
           <a:xfrm>
             <a:off x="4268520" y="439560"/>
-            <a:ext cx="7599240" cy="5627520"/>
+            <a:ext cx="7598880" cy="5627160"/>
           </a:xfrm>
           <a:prstGeom prst="rect">
             <a:avLst/>
